--- a/03_Shared/05_Workshop_Presentations/ECS_PI_Workshop_OOTB_First.pptx
+++ b/03_Shared/05_Workshop_Presentations/ECS_PI_Workshop_OOTB_First.pptx
@@ -12202,2179 +12202,123 @@
           </a:bodyPr>
           <a:lstStyle/>
           <a:p>
-            <a:pPr algn="l">
-              <a:spcAft>
-                <a:spcPts val="300"/>
-              </a:spcAft>
-            </a:pPr>
-            <a:r>
-              <a:rPr sz="850" b="0" i="0">
-                <a:solidFill>
-                  <a:srgbClr val="1E293B"/>
-                </a:solidFill>
-                <a:latin typeface="Calibri"/>
-              </a:rPr>
-              <a:t>✓  S</a:t>
-            </a:r>
-          </a:p>
-          <a:p>
-            <a:pPr algn="l">
-              <a:spcAft>
-                <a:spcPts val="300"/>
-              </a:spcAft>
-            </a:pPr>
-            <a:r>
-              <a:rPr sz="850" b="0" i="0">
-                <a:solidFill>
-                  <a:srgbClr val="1E293B"/>
-                </a:solidFill>
-                <a:latin typeface="Calibri"/>
-              </a:rPr>
-              <a:t>✓  o</a:t>
-            </a:r>
-          </a:p>
-          <a:p>
-            <a:pPr algn="l">
-              <a:spcAft>
-                <a:spcPts val="300"/>
-              </a:spcAft>
-            </a:pPr>
-            <a:r>
-              <a:rPr sz="850" b="0" i="0">
-                <a:solidFill>
-                  <a:srgbClr val="1E293B"/>
-                </a:solidFill>
-                <a:latin typeface="Calibri"/>
-              </a:rPr>
-              <a:t>✓  l</a:t>
-            </a:r>
-          </a:p>
-          <a:p>
-            <a:pPr algn="l">
-              <a:spcAft>
-                <a:spcPts val="300"/>
-              </a:spcAft>
-            </a:pPr>
-            <a:r>
-              <a:rPr sz="850" b="0" i="0">
-                <a:solidFill>
-                  <a:srgbClr val="1E293B"/>
-                </a:solidFill>
-                <a:latin typeface="Calibri"/>
-              </a:rPr>
-              <a:t>✓  u</a:t>
-            </a:r>
-          </a:p>
-          <a:p>
-            <a:pPr algn="l">
-              <a:spcAft>
-                <a:spcPts val="300"/>
-              </a:spcAft>
-            </a:pPr>
-            <a:r>
-              <a:rPr sz="850" b="0" i="0">
-                <a:solidFill>
-                  <a:srgbClr val="1E293B"/>
-                </a:solidFill>
-                <a:latin typeface="Calibri"/>
-              </a:rPr>
-              <a:t>✓  t</a:t>
-            </a:r>
-          </a:p>
-          <a:p>
-            <a:pPr algn="l">
-              <a:spcAft>
-                <a:spcPts val="300"/>
-              </a:spcAft>
-            </a:pPr>
-            <a:r>
-              <a:rPr sz="850" b="0" i="0">
-                <a:solidFill>
-                  <a:srgbClr val="1E293B"/>
-                </a:solidFill>
-                <a:latin typeface="Calibri"/>
-              </a:rPr>
-              <a:t>✓  i</a:t>
-            </a:r>
-          </a:p>
-          <a:p>
-            <a:pPr algn="l">
-              <a:spcAft>
-                <a:spcPts val="300"/>
-              </a:spcAft>
-            </a:pPr>
-            <a:r>
-              <a:rPr sz="850" b="0" i="0">
-                <a:solidFill>
-                  <a:srgbClr val="1E293B"/>
-                </a:solidFill>
-                <a:latin typeface="Calibri"/>
-              </a:rPr>
-              <a:t>✓  o</a:t>
-            </a:r>
-          </a:p>
-          <a:p>
-            <a:pPr algn="l">
-              <a:spcAft>
-                <a:spcPts val="300"/>
-              </a:spcAft>
-            </a:pPr>
-            <a:r>
-              <a:rPr sz="850" b="0" i="0">
-                <a:solidFill>
-                  <a:srgbClr val="1E293B"/>
-                </a:solidFill>
-                <a:latin typeface="Calibri"/>
-              </a:rPr>
-              <a:t>✓  n</a:t>
-            </a:r>
-          </a:p>
-          <a:p>
-            <a:pPr algn="l">
-              <a:spcAft>
-                <a:spcPts val="300"/>
-              </a:spcAft>
-            </a:pPr>
-            <a:r>
-              <a:rPr sz="850" b="0" i="0">
-                <a:solidFill>
-                  <a:srgbClr val="1E293B"/>
-                </a:solidFill>
-                <a:latin typeface="Calibri"/>
-              </a:rPr>
-              <a:t>✓   </a:t>
-            </a:r>
-          </a:p>
-          <a:p>
-            <a:pPr algn="l">
-              <a:spcAft>
-                <a:spcPts val="300"/>
-              </a:spcAft>
-            </a:pPr>
-            <a:r>
-              <a:rPr sz="850" b="0" i="0">
-                <a:solidFill>
-                  <a:srgbClr val="1E293B"/>
-                </a:solidFill>
-                <a:latin typeface="Calibri"/>
-              </a:rPr>
-              <a:t>✓  d</a:t>
-            </a:r>
-          </a:p>
-          <a:p>
-            <a:pPr algn="l">
-              <a:spcAft>
-                <a:spcPts val="300"/>
-              </a:spcAft>
-            </a:pPr>
-            <a:r>
-              <a:rPr sz="850" b="0" i="0">
-                <a:solidFill>
-                  <a:srgbClr val="1E293B"/>
-                </a:solidFill>
-                <a:latin typeface="Calibri"/>
-              </a:rPr>
-              <a:t>✓  e</a:t>
-            </a:r>
-          </a:p>
-          <a:p>
-            <a:pPr algn="l">
-              <a:spcAft>
-                <a:spcPts val="300"/>
-              </a:spcAft>
-            </a:pPr>
-            <a:r>
-              <a:rPr sz="850" b="0" i="0">
-                <a:solidFill>
-                  <a:srgbClr val="1E293B"/>
-                </a:solidFill>
-                <a:latin typeface="Calibri"/>
-              </a:rPr>
-              <a:t>✓  f</a:t>
-            </a:r>
-          </a:p>
-          <a:p>
-            <a:pPr algn="l">
-              <a:spcAft>
-                <a:spcPts val="300"/>
-              </a:spcAft>
-            </a:pPr>
-            <a:r>
-              <a:rPr sz="850" b="0" i="0">
-                <a:solidFill>
-                  <a:srgbClr val="1E293B"/>
-                </a:solidFill>
-                <a:latin typeface="Calibri"/>
-              </a:rPr>
-              <a:t>✓  i</a:t>
-            </a:r>
-          </a:p>
-          <a:p>
-            <a:pPr algn="l">
-              <a:spcAft>
-                <a:spcPts val="300"/>
-              </a:spcAft>
-            </a:pPr>
-            <a:r>
-              <a:rPr sz="850" b="0" i="0">
-                <a:solidFill>
-                  <a:srgbClr val="1E293B"/>
-                </a:solidFill>
-                <a:latin typeface="Calibri"/>
-              </a:rPr>
-              <a:t>✓  n</a:t>
-            </a:r>
-          </a:p>
-          <a:p>
-            <a:pPr algn="l">
-              <a:spcAft>
-                <a:spcPts val="300"/>
-              </a:spcAft>
-            </a:pPr>
-            <a:r>
-              <a:rPr sz="850" b="0" i="0">
-                <a:solidFill>
-                  <a:srgbClr val="1E293B"/>
-                </a:solidFill>
-                <a:latin typeface="Calibri"/>
-              </a:rPr>
-              <a:t>✓  i</a:t>
-            </a:r>
-          </a:p>
-          <a:p>
-            <a:pPr algn="l">
-              <a:spcAft>
-                <a:spcPts val="300"/>
-              </a:spcAft>
-            </a:pPr>
-            <a:r>
-              <a:rPr sz="850" b="0" i="0">
-                <a:solidFill>
-                  <a:srgbClr val="1E293B"/>
-                </a:solidFill>
-                <a:latin typeface="Calibri"/>
-              </a:rPr>
-              <a:t>✓  t</a:t>
-            </a:r>
-          </a:p>
-          <a:p>
-            <a:pPr algn="l">
-              <a:spcAft>
-                <a:spcPts val="300"/>
-              </a:spcAft>
-            </a:pPr>
-            <a:r>
-              <a:rPr sz="850" b="0" i="0">
-                <a:solidFill>
-                  <a:srgbClr val="1E293B"/>
-                </a:solidFill>
-                <a:latin typeface="Calibri"/>
-              </a:rPr>
-              <a:t>✓  i</a:t>
-            </a:r>
-          </a:p>
-          <a:p>
-            <a:pPr algn="l">
-              <a:spcAft>
-                <a:spcPts val="300"/>
-              </a:spcAft>
-            </a:pPr>
-            <a:r>
-              <a:rPr sz="850" b="0" i="0">
-                <a:solidFill>
-                  <a:srgbClr val="1E293B"/>
-                </a:solidFill>
-                <a:latin typeface="Calibri"/>
-              </a:rPr>
-              <a:t>✓  o</a:t>
-            </a:r>
-          </a:p>
-          <a:p>
-            <a:pPr algn="l">
-              <a:spcAft>
-                <a:spcPts val="300"/>
-              </a:spcAft>
-            </a:pPr>
-            <a:r>
-              <a:rPr sz="850" b="0" i="0">
-                <a:solidFill>
-                  <a:srgbClr val="1E293B"/>
-                </a:solidFill>
-                <a:latin typeface="Calibri"/>
-              </a:rPr>
-              <a:t>✓  n</a:t>
-            </a:r>
-          </a:p>
-          <a:p>
-            <a:pPr algn="l">
-              <a:spcAft>
-                <a:spcPts val="300"/>
-              </a:spcAft>
-            </a:pPr>
-            <a:r>
-              <a:rPr sz="850" b="0" i="0">
-                <a:solidFill>
-                  <a:srgbClr val="1E293B"/>
-                </a:solidFill>
-                <a:latin typeface="Calibri"/>
-              </a:rPr>
-              <a:t>✓  s</a:t>
-            </a:r>
-          </a:p>
-          <a:p>
-            <a:pPr algn="l">
-              <a:spcAft>
-                <a:spcPts val="300"/>
-              </a:spcAft>
-            </a:pPr>
-            <a:r>
-              <a:rPr sz="850" b="0" i="0">
-                <a:solidFill>
-                  <a:srgbClr val="1E293B"/>
-                </a:solidFill>
-                <a:latin typeface="Calibri"/>
-              </a:rPr>
-              <a:t>✓  ,</a:t>
-            </a:r>
-          </a:p>
-          <a:p>
-            <a:pPr algn="l">
-              <a:spcAft>
-                <a:spcPts val="300"/>
-              </a:spcAft>
-            </a:pPr>
-            <a:r>
-              <a:rPr sz="850" b="0" i="0">
-                <a:solidFill>
-                  <a:srgbClr val="1E293B"/>
-                </a:solidFill>
-                <a:latin typeface="Calibri"/>
-              </a:rPr>
-              <a:t>✓   </a:t>
-            </a:r>
-          </a:p>
-          <a:p>
-            <a:pPr algn="l">
-              <a:spcAft>
-                <a:spcPts val="300"/>
-              </a:spcAft>
-            </a:pPr>
-            <a:r>
-              <a:rPr sz="850" b="0" i="0">
-                <a:solidFill>
-                  <a:srgbClr val="1E293B"/>
-                </a:solidFill>
-                <a:latin typeface="Calibri"/>
-              </a:rPr>
-              <a:t>✓  t</a:t>
-            </a:r>
-          </a:p>
-          <a:p>
-            <a:pPr algn="l">
-              <a:spcAft>
-                <a:spcPts val="300"/>
-              </a:spcAft>
-            </a:pPr>
-            <a:r>
-              <a:rPr sz="850" b="0" i="0">
-                <a:solidFill>
-                  <a:srgbClr val="1E293B"/>
-                </a:solidFill>
-                <a:latin typeface="Calibri"/>
-              </a:rPr>
-              <a:t>✓  r</a:t>
-            </a:r>
-          </a:p>
-          <a:p>
-            <a:pPr algn="l">
-              <a:spcAft>
-                <a:spcPts val="300"/>
-              </a:spcAft>
-            </a:pPr>
-            <a:r>
-              <a:rPr sz="850" b="0" i="0">
-                <a:solidFill>
-                  <a:srgbClr val="1E293B"/>
-                </a:solidFill>
-                <a:latin typeface="Calibri"/>
-              </a:rPr>
-              <a:t>✓  a</a:t>
-            </a:r>
-          </a:p>
-          <a:p>
-            <a:pPr algn="l">
-              <a:spcAft>
-                <a:spcPts val="300"/>
-              </a:spcAft>
-            </a:pPr>
-            <a:r>
-              <a:rPr sz="850" b="0" i="0">
-                <a:solidFill>
-                  <a:srgbClr val="1E293B"/>
-                </a:solidFill>
-                <a:latin typeface="Calibri"/>
-              </a:rPr>
-              <a:t>✓  i</a:t>
-            </a:r>
-          </a:p>
-          <a:p>
-            <a:pPr algn="l">
-              <a:spcAft>
-                <a:spcPts val="300"/>
-              </a:spcAft>
-            </a:pPr>
-            <a:r>
-              <a:rPr sz="850" b="0" i="0">
-                <a:solidFill>
-                  <a:srgbClr val="1E293B"/>
-                </a:solidFill>
-                <a:latin typeface="Calibri"/>
-              </a:rPr>
-              <a:t>✓  n</a:t>
-            </a:r>
-          </a:p>
-          <a:p>
-            <a:pPr algn="l">
-              <a:spcAft>
-                <a:spcPts val="300"/>
-              </a:spcAft>
-            </a:pPr>
-            <a:r>
-              <a:rPr sz="850" b="0" i="0">
-                <a:solidFill>
-                  <a:srgbClr val="1E293B"/>
-                </a:solidFill>
-                <a:latin typeface="Calibri"/>
-              </a:rPr>
-              <a:t>✓  i</a:t>
-            </a:r>
-          </a:p>
-          <a:p>
-            <a:pPr algn="l">
-              <a:spcAft>
-                <a:spcPts val="300"/>
-              </a:spcAft>
-            </a:pPr>
-            <a:r>
-              <a:rPr sz="850" b="0" i="0">
-                <a:solidFill>
-                  <a:srgbClr val="1E293B"/>
-                </a:solidFill>
-                <a:latin typeface="Calibri"/>
-              </a:rPr>
-              <a:t>✓  n</a:t>
-            </a:r>
-          </a:p>
-          <a:p>
-            <a:pPr algn="l">
-              <a:spcAft>
-                <a:spcPts val="300"/>
-              </a:spcAft>
-            </a:pPr>
-            <a:r>
-              <a:rPr sz="850" b="0" i="0">
-                <a:solidFill>
-                  <a:srgbClr val="1E293B"/>
-                </a:solidFill>
-                <a:latin typeface="Calibri"/>
-              </a:rPr>
-              <a:t>✓  g</a:t>
-            </a:r>
-          </a:p>
-          <a:p>
-            <a:pPr algn="l">
-              <a:spcAft>
-                <a:spcPts val="300"/>
-              </a:spcAft>
-            </a:pPr>
-            <a:r>
-              <a:rPr sz="850" b="0" i="0">
-                <a:solidFill>
-                  <a:srgbClr val="1E293B"/>
-                </a:solidFill>
-                <a:latin typeface="Calibri"/>
-              </a:rPr>
-              <a:t>✓   </a:t>
-            </a:r>
-          </a:p>
-          <a:p>
-            <a:pPr algn="l">
-              <a:spcAft>
-                <a:spcPts val="300"/>
-              </a:spcAft>
-            </a:pPr>
-            <a:r>
-              <a:rPr sz="850" b="0" i="0">
-                <a:solidFill>
-                  <a:srgbClr val="1E293B"/>
-                </a:solidFill>
-                <a:latin typeface="Calibri"/>
-              </a:rPr>
-              <a:t>✓  d</a:t>
-            </a:r>
-          </a:p>
-          <a:p>
-            <a:pPr algn="l">
-              <a:spcAft>
-                <a:spcPts val="300"/>
-              </a:spcAft>
-            </a:pPr>
-            <a:r>
-              <a:rPr sz="850" b="0" i="0">
-                <a:solidFill>
-                  <a:srgbClr val="1E293B"/>
-                </a:solidFill>
-                <a:latin typeface="Calibri"/>
-              </a:rPr>
-              <a:t>✓  a</a:t>
-            </a:r>
-          </a:p>
-          <a:p>
-            <a:pPr algn="l">
-              <a:spcAft>
-                <a:spcPts val="300"/>
-              </a:spcAft>
-            </a:pPr>
-            <a:r>
-              <a:rPr sz="850" b="0" i="0">
-                <a:solidFill>
-                  <a:srgbClr val="1E293B"/>
-                </a:solidFill>
-                <a:latin typeface="Calibri"/>
-              </a:rPr>
-              <a:t>✓  t</a:t>
-            </a:r>
-          </a:p>
-          <a:p>
-            <a:pPr algn="l">
-              <a:spcAft>
-                <a:spcPts val="300"/>
-              </a:spcAft>
-            </a:pPr>
-            <a:r>
-              <a:rPr sz="850" b="0" i="0">
-                <a:solidFill>
-                  <a:srgbClr val="1E293B"/>
-                </a:solidFill>
-                <a:latin typeface="Calibri"/>
-              </a:rPr>
-              <a:t>✓  a</a:t>
-            </a:r>
-          </a:p>
-          <a:p>
-            <a:pPr algn="l">
-              <a:spcAft>
-                <a:spcPts val="300"/>
-              </a:spcAft>
-            </a:pPr>
-            <a:r>
-              <a:rPr sz="850" b="0" i="0">
-                <a:solidFill>
-                  <a:srgbClr val="1E293B"/>
-                </a:solidFill>
-                <a:latin typeface="Calibri"/>
-              </a:rPr>
-              <a:t>✓   </a:t>
-            </a:r>
-          </a:p>
-          <a:p>
-            <a:pPr algn="l">
-              <a:spcAft>
-                <a:spcPts val="300"/>
-              </a:spcAft>
-            </a:pPr>
-            <a:r>
-              <a:rPr sz="850" b="0" i="0">
-                <a:solidFill>
-                  <a:srgbClr val="1E293B"/>
-                </a:solidFill>
-                <a:latin typeface="Calibri"/>
-              </a:rPr>
-              <a:t>✓  f</a:t>
-            </a:r>
-          </a:p>
-          <a:p>
-            <a:pPr algn="l">
-              <a:spcAft>
-                <a:spcPts val="300"/>
-              </a:spcAft>
-            </a:pPr>
-            <a:r>
-              <a:rPr sz="850" b="0" i="0">
-                <a:solidFill>
-                  <a:srgbClr val="1E293B"/>
-                </a:solidFill>
-                <a:latin typeface="Calibri"/>
-              </a:rPr>
-              <a:t>✓  i</a:t>
-            </a:r>
-          </a:p>
-          <a:p>
-            <a:pPr algn="l">
-              <a:spcAft>
-                <a:spcPts val="300"/>
-              </a:spcAft>
-            </a:pPr>
-            <a:r>
-              <a:rPr sz="850" b="0" i="0">
-                <a:solidFill>
-                  <a:srgbClr val="1E293B"/>
-                </a:solidFill>
-                <a:latin typeface="Calibri"/>
-              </a:rPr>
-              <a:t>✓  l</a:t>
-            </a:r>
-          </a:p>
-          <a:p>
-            <a:pPr algn="l">
-              <a:spcAft>
-                <a:spcPts val="300"/>
-              </a:spcAft>
-            </a:pPr>
-            <a:r>
-              <a:rPr sz="850" b="0" i="0">
-                <a:solidFill>
-                  <a:srgbClr val="1E293B"/>
-                </a:solidFill>
-                <a:latin typeface="Calibri"/>
-              </a:rPr>
-              <a:t>✓  t</a:t>
-            </a:r>
-          </a:p>
-          <a:p>
-            <a:pPr algn="l">
-              <a:spcAft>
-                <a:spcPts val="300"/>
-              </a:spcAft>
-            </a:pPr>
-            <a:r>
-              <a:rPr sz="850" b="0" i="0">
-                <a:solidFill>
-                  <a:srgbClr val="1E293B"/>
-                </a:solidFill>
-                <a:latin typeface="Calibri"/>
-              </a:rPr>
-              <a:t>✓  e</a:t>
-            </a:r>
-          </a:p>
-          <a:p>
-            <a:pPr algn="l">
-              <a:spcAft>
-                <a:spcPts val="300"/>
-              </a:spcAft>
-            </a:pPr>
-            <a:r>
-              <a:rPr sz="850" b="0" i="0">
-                <a:solidFill>
-                  <a:srgbClr val="1E293B"/>
-                </a:solidFill>
-                <a:latin typeface="Calibri"/>
-              </a:rPr>
-              <a:t>✓  r</a:t>
-            </a:r>
-          </a:p>
-          <a:p>
-            <a:pPr algn="l">
-              <a:spcAft>
-                <a:spcPts val="300"/>
-              </a:spcAft>
-            </a:pPr>
-            <a:r>
-              <a:rPr sz="850" b="0" i="0">
-                <a:solidFill>
-                  <a:srgbClr val="1E293B"/>
-                </a:solidFill>
-                <a:latin typeface="Calibri"/>
-              </a:rPr>
-              <a:t>✓  s</a:t>
-            </a:r>
-          </a:p>
-          <a:p>
-            <a:pPr algn="l">
-              <a:spcAft>
-                <a:spcPts val="300"/>
-              </a:spcAft>
-            </a:pPr>
-            <a:r>
-              <a:rPr sz="850" b="0" i="0">
-                <a:solidFill>
-                  <a:srgbClr val="1E293B"/>
-                </a:solidFill>
-                <a:latin typeface="Calibri"/>
-              </a:rPr>
-              <a:t>✓  ,</a:t>
-            </a:r>
-          </a:p>
-          <a:p>
-            <a:pPr algn="l">
-              <a:spcAft>
-                <a:spcPts val="300"/>
-              </a:spcAft>
-            </a:pPr>
-            <a:r>
-              <a:rPr sz="850" b="0" i="0">
-                <a:solidFill>
-                  <a:srgbClr val="1E293B"/>
-                </a:solidFill>
-                <a:latin typeface="Calibri"/>
-              </a:rPr>
-              <a:t>✓   </a:t>
-            </a:r>
-          </a:p>
-          <a:p>
-            <a:pPr algn="l">
-              <a:spcAft>
-                <a:spcPts val="300"/>
-              </a:spcAft>
-            </a:pPr>
-            <a:r>
-              <a:rPr sz="850" b="0" i="0">
-                <a:solidFill>
-                  <a:srgbClr val="1E293B"/>
-                </a:solidFill>
-                <a:latin typeface="Calibri"/>
-              </a:rPr>
-              <a:t>✓  c</a:t>
-            </a:r>
-          </a:p>
-          <a:p>
-            <a:pPr algn="l">
-              <a:spcAft>
-                <a:spcPts val="300"/>
-              </a:spcAft>
-            </a:pPr>
-            <a:r>
-              <a:rPr sz="850" b="0" i="0">
-                <a:solidFill>
-                  <a:srgbClr val="1E293B"/>
-                </a:solidFill>
-                <a:latin typeface="Calibri"/>
-              </a:rPr>
-              <a:t>✓  o</a:t>
-            </a:r>
-          </a:p>
-          <a:p>
-            <a:pPr algn="l">
-              <a:spcAft>
-                <a:spcPts val="300"/>
-              </a:spcAft>
-            </a:pPr>
-            <a:r>
-              <a:rPr sz="850" b="0" i="0">
-                <a:solidFill>
-                  <a:srgbClr val="1E293B"/>
-                </a:solidFill>
-                <a:latin typeface="Calibri"/>
-              </a:rPr>
-              <a:t>✓  n</a:t>
-            </a:r>
-          </a:p>
-          <a:p>
-            <a:pPr algn="l">
-              <a:spcAft>
-                <a:spcPts val="300"/>
-              </a:spcAft>
-            </a:pPr>
-            <a:r>
-              <a:rPr sz="850" b="0" i="0">
-                <a:solidFill>
-                  <a:srgbClr val="1E293B"/>
-                </a:solidFill>
-                <a:latin typeface="Calibri"/>
-              </a:rPr>
-              <a:t>✓  f</a:t>
-            </a:r>
-          </a:p>
-          <a:p>
-            <a:pPr algn="l">
-              <a:spcAft>
-                <a:spcPts val="300"/>
-              </a:spcAft>
-            </a:pPr>
-            <a:r>
-              <a:rPr sz="850" b="0" i="0">
-                <a:solidFill>
-                  <a:srgbClr val="1E293B"/>
-                </a:solidFill>
-                <a:latin typeface="Calibri"/>
-              </a:rPr>
-              <a:t>✓  i</a:t>
-            </a:r>
-          </a:p>
-          <a:p>
-            <a:pPr algn="l">
-              <a:spcAft>
-                <a:spcPts val="300"/>
-              </a:spcAft>
-            </a:pPr>
-            <a:r>
-              <a:rPr sz="850" b="0" i="0">
-                <a:solidFill>
-                  <a:srgbClr val="1E293B"/>
-                </a:solidFill>
-                <a:latin typeface="Calibri"/>
-              </a:rPr>
-              <a:t>✓  d</a:t>
-            </a:r>
-          </a:p>
-          <a:p>
-            <a:pPr algn="l">
-              <a:spcAft>
-                <a:spcPts val="300"/>
-              </a:spcAft>
-            </a:pPr>
-            <a:r>
-              <a:rPr sz="850" b="0" i="0">
-                <a:solidFill>
-                  <a:srgbClr val="1E293B"/>
-                </a:solidFill>
-                <a:latin typeface="Calibri"/>
-              </a:rPr>
-              <a:t>✓  e</a:t>
-            </a:r>
-          </a:p>
-          <a:p>
-            <a:pPr algn="l">
-              <a:spcAft>
-                <a:spcPts val="300"/>
-              </a:spcAft>
-            </a:pPr>
-            <a:r>
-              <a:rPr sz="850" b="0" i="0">
-                <a:solidFill>
-                  <a:srgbClr val="1E293B"/>
-                </a:solidFill>
-                <a:latin typeface="Calibri"/>
-              </a:rPr>
-              <a:t>✓  n</a:t>
-            </a:r>
-          </a:p>
-          <a:p>
-            <a:pPr algn="l">
-              <a:spcAft>
-                <a:spcPts val="300"/>
-              </a:spcAft>
-            </a:pPr>
-            <a:r>
-              <a:rPr sz="850" b="0" i="0">
-                <a:solidFill>
-                  <a:srgbClr val="1E293B"/>
-                </a:solidFill>
-                <a:latin typeface="Calibri"/>
-              </a:rPr>
-              <a:t>✓  c</a:t>
-            </a:r>
-          </a:p>
-          <a:p>
-            <a:pPr algn="l">
-              <a:spcAft>
-                <a:spcPts val="300"/>
-              </a:spcAft>
-            </a:pPr>
-            <a:r>
-              <a:rPr sz="850" b="0" i="0">
-                <a:solidFill>
-                  <a:srgbClr val="1E293B"/>
-                </a:solidFill>
-                <a:latin typeface="Calibri"/>
-              </a:rPr>
-              <a:t>✓  e</a:t>
-            </a:r>
-          </a:p>
-          <a:p>
-            <a:pPr algn="l">
-              <a:spcAft>
-                <a:spcPts val="300"/>
-              </a:spcAft>
-            </a:pPr>
-            <a:r>
-              <a:rPr sz="850" b="0" i="0">
-                <a:solidFill>
-                  <a:srgbClr val="1E293B"/>
-                </a:solidFill>
-                <a:latin typeface="Calibri"/>
-              </a:rPr>
-              <a:t>✓   </a:t>
-            </a:r>
-          </a:p>
-          <a:p>
-            <a:pPr algn="l">
-              <a:spcAft>
-                <a:spcPts val="300"/>
-              </a:spcAft>
-            </a:pPr>
-            <a:r>
-              <a:rPr sz="850" b="0" i="0">
-                <a:solidFill>
-                  <a:srgbClr val="1E293B"/>
-                </a:solidFill>
-                <a:latin typeface="Calibri"/>
-              </a:rPr>
-              <a:t>✓  t</a:t>
-            </a:r>
-          </a:p>
-          <a:p>
-            <a:pPr algn="l">
-              <a:spcAft>
-                <a:spcPts val="300"/>
-              </a:spcAft>
-            </a:pPr>
-            <a:r>
-              <a:rPr sz="850" b="0" i="0">
-                <a:solidFill>
-                  <a:srgbClr val="1E293B"/>
-                </a:solidFill>
-                <a:latin typeface="Calibri"/>
-              </a:rPr>
-              <a:t>✓  h</a:t>
-            </a:r>
-          </a:p>
-          <a:p>
-            <a:pPr algn="l">
-              <a:spcAft>
-                <a:spcPts val="300"/>
-              </a:spcAft>
-            </a:pPr>
-            <a:r>
-              <a:rPr sz="850" b="0" i="0">
-                <a:solidFill>
-                  <a:srgbClr val="1E293B"/>
-                </a:solidFill>
-                <a:latin typeface="Calibri"/>
-              </a:rPr>
-              <a:t>✓  r</a:t>
-            </a:r>
-          </a:p>
-          <a:p>
-            <a:pPr algn="l">
-              <a:spcAft>
-                <a:spcPts val="300"/>
-              </a:spcAft>
-            </a:pPr>
-            <a:r>
-              <a:rPr sz="850" b="0" i="0">
-                <a:solidFill>
-                  <a:srgbClr val="1E293B"/>
-                </a:solidFill>
-                <a:latin typeface="Calibri"/>
-              </a:rPr>
-              <a:t>✓  e</a:t>
-            </a:r>
-          </a:p>
-          <a:p>
-            <a:pPr algn="l">
-              <a:spcAft>
-                <a:spcPts val="300"/>
-              </a:spcAft>
-            </a:pPr>
-            <a:r>
-              <a:rPr sz="850" b="0" i="0">
-                <a:solidFill>
-                  <a:srgbClr val="1E293B"/>
-                </a:solidFill>
-                <a:latin typeface="Calibri"/>
-              </a:rPr>
-              <a:t>✓  s</a:t>
-            </a:r>
-          </a:p>
-          <a:p>
-            <a:pPr algn="l">
-              <a:spcAft>
-                <a:spcPts val="300"/>
-              </a:spcAft>
-            </a:pPr>
-            <a:r>
-              <a:rPr sz="850" b="0" i="0">
-                <a:solidFill>
-                  <a:srgbClr val="1E293B"/>
-                </a:solidFill>
-                <a:latin typeface="Calibri"/>
-              </a:rPr>
-              <a:t>✓  h</a:t>
-            </a:r>
-          </a:p>
-          <a:p>
-            <a:pPr algn="l">
-              <a:spcAft>
-                <a:spcPts val="300"/>
-              </a:spcAft>
-            </a:pPr>
-            <a:r>
-              <a:rPr sz="850" b="0" i="0">
-                <a:solidFill>
-                  <a:srgbClr val="1E293B"/>
-                </a:solidFill>
-                <a:latin typeface="Calibri"/>
-              </a:rPr>
-              <a:t>✓  o</a:t>
-            </a:r>
-          </a:p>
-          <a:p>
-            <a:pPr algn="l">
-              <a:spcAft>
-                <a:spcPts val="300"/>
-              </a:spcAft>
-            </a:pPr>
-            <a:r>
-              <a:rPr sz="850" b="0" i="0">
-                <a:solidFill>
-                  <a:srgbClr val="1E293B"/>
-                </a:solidFill>
-                <a:latin typeface="Calibri"/>
-              </a:rPr>
-              <a:t>✓  l</a:t>
-            </a:r>
-          </a:p>
-          <a:p>
-            <a:pPr algn="l">
-              <a:spcAft>
-                <a:spcPts val="300"/>
-              </a:spcAft>
-            </a:pPr>
-            <a:r>
-              <a:rPr sz="850" b="0" i="0">
-                <a:solidFill>
-                  <a:srgbClr val="1E293B"/>
-                </a:solidFill>
-                <a:latin typeface="Calibri"/>
-              </a:rPr>
-              <a:t>✓  d</a:t>
-            </a:r>
-          </a:p>
-          <a:p>
-            <a:pPr algn="l">
-              <a:spcAft>
-                <a:spcPts val="300"/>
-              </a:spcAft>
-            </a:pPr>
-            <a:r>
-              <a:rPr sz="850" b="0" i="0">
-                <a:solidFill>
-                  <a:srgbClr val="1E293B"/>
-                </a:solidFill>
-                <a:latin typeface="Calibri"/>
-              </a:rPr>
-              <a:t>✓  s</a:t>
-            </a:r>
-          </a:p>
-          <a:p>
-            <a:pPr algn="l">
-              <a:spcAft>
-                <a:spcPts val="300"/>
-              </a:spcAft>
-            </a:pPr>
-            <a:r>
-              <a:rPr sz="850" b="0" i="0">
-                <a:solidFill>
-                  <a:srgbClr val="1E293B"/>
-                </a:solidFill>
-                <a:latin typeface="Calibri"/>
-              </a:rPr>
-              <a:t>✓  ,</a:t>
-            </a:r>
-          </a:p>
-          <a:p>
-            <a:pPr algn="l">
-              <a:spcAft>
-                <a:spcPts val="300"/>
-              </a:spcAft>
-            </a:pPr>
-            <a:r>
-              <a:rPr sz="850" b="0" i="0">
-                <a:solidFill>
-                  <a:srgbClr val="1E293B"/>
-                </a:solidFill>
-                <a:latin typeface="Calibri"/>
-              </a:rPr>
-              <a:t>✓   </a:t>
-            </a:r>
-          </a:p>
-          <a:p>
-            <a:pPr algn="l">
-              <a:spcAft>
-                <a:spcPts val="300"/>
-              </a:spcAft>
-            </a:pPr>
-            <a:r>
-              <a:rPr sz="850" b="0" i="0">
-                <a:solidFill>
-                  <a:srgbClr val="1E293B"/>
-                </a:solidFill>
-                <a:latin typeface="Calibri"/>
-              </a:rPr>
-              <a:t>✓  f</a:t>
-            </a:r>
-          </a:p>
-          <a:p>
-            <a:pPr algn="l">
-              <a:spcAft>
-                <a:spcPts val="300"/>
-              </a:spcAft>
-            </a:pPr>
-            <a:r>
-              <a:rPr sz="850" b="0" i="0">
-                <a:solidFill>
-                  <a:srgbClr val="1E293B"/>
-                </a:solidFill>
-                <a:latin typeface="Calibri"/>
-              </a:rPr>
-              <a:t>✓  e</a:t>
-            </a:r>
-          </a:p>
-          <a:p>
-            <a:pPr algn="l">
-              <a:spcAft>
-                <a:spcPts val="300"/>
-              </a:spcAft>
-            </a:pPr>
-            <a:r>
-              <a:rPr sz="850" b="0" i="0">
-                <a:solidFill>
-                  <a:srgbClr val="1E293B"/>
-                </a:solidFill>
-                <a:latin typeface="Calibri"/>
-              </a:rPr>
-              <a:t>✓  e</a:t>
-            </a:r>
-          </a:p>
-          <a:p>
-            <a:pPr algn="l">
-              <a:spcAft>
-                <a:spcPts val="300"/>
-              </a:spcAft>
-            </a:pPr>
-            <a:r>
-              <a:rPr sz="850" b="0" i="0">
-                <a:solidFill>
-                  <a:srgbClr val="1E293B"/>
-                </a:solidFill>
-                <a:latin typeface="Calibri"/>
-              </a:rPr>
-              <a:t>✓  d</a:t>
-            </a:r>
-          </a:p>
-          <a:p>
-            <a:pPr algn="l">
-              <a:spcAft>
-                <a:spcPts val="300"/>
-              </a:spcAft>
-            </a:pPr>
-            <a:r>
-              <a:rPr sz="850" b="0" i="0">
-                <a:solidFill>
-                  <a:srgbClr val="1E293B"/>
-                </a:solidFill>
-                <a:latin typeface="Calibri"/>
-              </a:rPr>
-              <a:t>✓  b</a:t>
-            </a:r>
-          </a:p>
-          <a:p>
-            <a:pPr algn="l">
-              <a:spcAft>
-                <a:spcPts val="300"/>
-              </a:spcAft>
-            </a:pPr>
-            <a:r>
-              <a:rPr sz="850" b="0" i="0">
-                <a:solidFill>
-                  <a:srgbClr val="1E293B"/>
-                </a:solidFill>
-                <a:latin typeface="Calibri"/>
-              </a:rPr>
-              <a:t>✓  a</a:t>
-            </a:r>
-          </a:p>
-          <a:p>
-            <a:pPr algn="l">
-              <a:spcAft>
-                <a:spcPts val="300"/>
-              </a:spcAft>
-            </a:pPr>
-            <a:r>
-              <a:rPr sz="850" b="0" i="0">
-                <a:solidFill>
-                  <a:srgbClr val="1E293B"/>
-                </a:solidFill>
-                <a:latin typeface="Calibri"/>
-              </a:rPr>
-              <a:t>✓  c</a:t>
-            </a:r>
-          </a:p>
-          <a:p>
-            <a:pPr algn="l">
-              <a:spcAft>
-                <a:spcPts val="300"/>
-              </a:spcAft>
-            </a:pPr>
-            <a:r>
-              <a:rPr sz="850" b="0" i="0">
-                <a:solidFill>
-                  <a:srgbClr val="1E293B"/>
-                </a:solidFill>
-                <a:latin typeface="Calibri"/>
-              </a:rPr>
-              <a:t>✓  k</a:t>
-            </a:r>
-          </a:p>
-          <a:p>
-            <a:pPr algn="l">
-              <a:spcAft>
-                <a:spcPts val="300"/>
-              </a:spcAft>
-            </a:pPr>
-            <a:r>
-              <a:rPr sz="850" b="0" i="0">
-                <a:solidFill>
-                  <a:srgbClr val="1E293B"/>
-                </a:solidFill>
-                <a:latin typeface="Calibri"/>
-              </a:rPr>
-              <a:t>✓   </a:t>
-            </a:r>
-          </a:p>
-          <a:p>
-            <a:pPr algn="l">
-              <a:spcAft>
-                <a:spcPts val="300"/>
-              </a:spcAft>
-            </a:pPr>
-            <a:r>
-              <a:rPr sz="850" b="0" i="0">
-                <a:solidFill>
-                  <a:srgbClr val="1E293B"/>
-                </a:solidFill>
-                <a:latin typeface="Calibri"/>
-              </a:rPr>
-              <a:t>✓  c</a:t>
-            </a:r>
-          </a:p>
-          <a:p>
-            <a:pPr algn="l">
-              <a:spcAft>
-                <a:spcPts val="300"/>
-              </a:spcAft>
-            </a:pPr>
-            <a:r>
-              <a:rPr sz="850" b="0" i="0">
-                <a:solidFill>
-                  <a:srgbClr val="1E293B"/>
-                </a:solidFill>
-                <a:latin typeface="Calibri"/>
-              </a:rPr>
-              <a:t>✓  o</a:t>
-            </a:r>
-          </a:p>
-          <a:p>
-            <a:pPr algn="l">
-              <a:spcAft>
-                <a:spcPts val="300"/>
-              </a:spcAft>
-            </a:pPr>
-            <a:r>
-              <a:rPr sz="850" b="0" i="0">
-                <a:solidFill>
-                  <a:srgbClr val="1E293B"/>
-                </a:solidFill>
-                <a:latin typeface="Calibri"/>
-              </a:rPr>
-              <a:t>✓  n</a:t>
-            </a:r>
-          </a:p>
-          <a:p>
-            <a:pPr algn="l">
-              <a:spcAft>
-                <a:spcPts val="300"/>
-              </a:spcAft>
-            </a:pPr>
-            <a:r>
-              <a:rPr sz="850" b="0" i="0">
-                <a:solidFill>
-                  <a:srgbClr val="1E293B"/>
-                </a:solidFill>
-                <a:latin typeface="Calibri"/>
-              </a:rPr>
-              <a:t>✓  f</a:t>
-            </a:r>
-          </a:p>
-          <a:p>
-            <a:pPr algn="l">
-              <a:spcAft>
-                <a:spcPts val="300"/>
-              </a:spcAft>
-            </a:pPr>
-            <a:r>
-              <a:rPr sz="850" b="0" i="0">
-                <a:solidFill>
-                  <a:srgbClr val="1E293B"/>
-                </a:solidFill>
-                <a:latin typeface="Calibri"/>
-              </a:rPr>
-              <a:t>✓  i</a:t>
-            </a:r>
-          </a:p>
-          <a:p>
-            <a:pPr algn="l">
-              <a:spcAft>
-                <a:spcPts val="300"/>
-              </a:spcAft>
-            </a:pPr>
-            <a:r>
-              <a:rPr sz="850" b="0" i="0">
-                <a:solidFill>
-                  <a:srgbClr val="1E293B"/>
-                </a:solidFill>
-                <a:latin typeface="Calibri"/>
-              </a:rPr>
-              <a:t>✓  g</a:t>
-            </a:r>
-          </a:p>
-          <a:p>
-            <a:pPr algn="l">
-              <a:spcAft>
-                <a:spcPts val="300"/>
-              </a:spcAft>
-            </a:pPr>
-            <a:r>
-              <a:rPr sz="850" b="0" i="0">
-                <a:solidFill>
-                  <a:srgbClr val="1E293B"/>
-                </a:solidFill>
-                <a:latin typeface="Calibri"/>
-              </a:rPr>
-              <a:t>✓  u</a:t>
-            </a:r>
-          </a:p>
-          <a:p>
-            <a:pPr algn="l">
-              <a:spcAft>
-                <a:spcPts val="300"/>
-              </a:spcAft>
-            </a:pPr>
-            <a:r>
-              <a:rPr sz="850" b="0" i="0">
-                <a:solidFill>
-                  <a:srgbClr val="1E293B"/>
-                </a:solidFill>
-                <a:latin typeface="Calibri"/>
-              </a:rPr>
-              <a:t>✓  r</a:t>
-            </a:r>
-          </a:p>
-          <a:p>
-            <a:pPr algn="l">
-              <a:spcAft>
-                <a:spcPts val="300"/>
-              </a:spcAft>
-            </a:pPr>
-            <a:r>
-              <a:rPr sz="850" b="0" i="0">
-                <a:solidFill>
-                  <a:srgbClr val="1E293B"/>
-                </a:solidFill>
-                <a:latin typeface="Calibri"/>
-              </a:rPr>
-              <a:t>✓  a</a:t>
-            </a:r>
-          </a:p>
-          <a:p>
-            <a:pPr algn="l">
-              <a:spcAft>
-                <a:spcPts val="300"/>
-              </a:spcAft>
-            </a:pPr>
-            <a:r>
-              <a:rPr sz="850" b="0" i="0">
-                <a:solidFill>
-                  <a:srgbClr val="1E293B"/>
-                </a:solidFill>
-                <a:latin typeface="Calibri"/>
-              </a:rPr>
-              <a:t>✓  t</a:t>
-            </a:r>
-          </a:p>
-          <a:p>
-            <a:pPr algn="l">
-              <a:spcAft>
-                <a:spcPts val="300"/>
-              </a:spcAft>
-            </a:pPr>
-            <a:r>
-              <a:rPr sz="850" b="0" i="0">
-                <a:solidFill>
-                  <a:srgbClr val="1E293B"/>
-                </a:solidFill>
-                <a:latin typeface="Calibri"/>
-              </a:rPr>
-              <a:t>✓  i</a:t>
-            </a:r>
-          </a:p>
-          <a:p>
-            <a:pPr algn="l">
-              <a:spcAft>
-                <a:spcPts val="300"/>
-              </a:spcAft>
-            </a:pPr>
-            <a:r>
-              <a:rPr sz="850" b="0" i="0">
-                <a:solidFill>
-                  <a:srgbClr val="1E293B"/>
-                </a:solidFill>
-                <a:latin typeface="Calibri"/>
-              </a:rPr>
-              <a:t>✓  o</a:t>
-            </a:r>
-          </a:p>
-          <a:p>
-            <a:pPr algn="l">
-              <a:spcAft>
-                <a:spcPts val="300"/>
-              </a:spcAft>
-            </a:pPr>
-            <a:r>
-              <a:rPr sz="850" b="0" i="0">
-                <a:solidFill>
-                  <a:srgbClr val="1E293B"/>
-                </a:solidFill>
-                <a:latin typeface="Calibri"/>
-              </a:rPr>
-              <a:t>✓  n</a:t>
-            </a:r>
-          </a:p>
-          <a:p>
-            <a:pPr algn="l">
-              <a:spcAft>
-                <a:spcPts val="300"/>
-              </a:spcAft>
-            </a:pPr>
-            <a:r>
-              <a:rPr sz="850" b="0" i="0">
-                <a:solidFill>
-                  <a:srgbClr val="1E293B"/>
-                </a:solidFill>
-                <a:latin typeface="Calibri"/>
-              </a:rPr>
-              <a:t>✓  ,</a:t>
-            </a:r>
-          </a:p>
-          <a:p>
-            <a:pPr algn="l">
-              <a:spcAft>
-                <a:spcPts val="300"/>
-              </a:spcAft>
-            </a:pPr>
-            <a:r>
-              <a:rPr sz="850" b="0" i="0">
-                <a:solidFill>
-                  <a:srgbClr val="1E293B"/>
-                </a:solidFill>
-                <a:latin typeface="Calibri"/>
-              </a:rPr>
-              <a:t>✓   </a:t>
-            </a:r>
-          </a:p>
-          <a:p>
-            <a:pPr algn="l">
-              <a:spcAft>
-                <a:spcPts val="300"/>
-              </a:spcAft>
-            </a:pPr>
-            <a:r>
-              <a:rPr sz="850" b="0" i="0">
-                <a:solidFill>
-                  <a:srgbClr val="1E293B"/>
-                </a:solidFill>
-                <a:latin typeface="Calibri"/>
-              </a:rPr>
-              <a:t>✓  m</a:t>
-            </a:r>
-          </a:p>
-          <a:p>
-            <a:pPr algn="l">
-              <a:spcAft>
-                <a:spcPts val="300"/>
-              </a:spcAft>
-            </a:pPr>
-            <a:r>
-              <a:rPr sz="850" b="0" i="0">
-                <a:solidFill>
-                  <a:srgbClr val="1E293B"/>
-                </a:solidFill>
-                <a:latin typeface="Calibri"/>
-              </a:rPr>
-              <a:t>✓  o</a:t>
-            </a:r>
-          </a:p>
-          <a:p>
-            <a:pPr algn="l">
-              <a:spcAft>
-                <a:spcPts val="300"/>
-              </a:spcAft>
-            </a:pPr>
-            <a:r>
-              <a:rPr sz="850" b="0" i="0">
-                <a:solidFill>
-                  <a:srgbClr val="1E293B"/>
-                </a:solidFill>
-                <a:latin typeface="Calibri"/>
-              </a:rPr>
-              <a:t>✓  d</a:t>
-            </a:r>
-          </a:p>
-          <a:p>
-            <a:pPr algn="l">
-              <a:spcAft>
-                <a:spcPts val="300"/>
-              </a:spcAft>
-            </a:pPr>
-            <a:r>
-              <a:rPr sz="850" b="0" i="0">
-                <a:solidFill>
-                  <a:srgbClr val="1E293B"/>
-                </a:solidFill>
-                <a:latin typeface="Calibri"/>
-              </a:rPr>
-              <a:t>✓  e</a:t>
-            </a:r>
-          </a:p>
-          <a:p>
-            <a:pPr algn="l">
-              <a:spcAft>
-                <a:spcPts val="300"/>
-              </a:spcAft>
-            </a:pPr>
-            <a:r>
-              <a:rPr sz="850" b="0" i="0">
-                <a:solidFill>
-                  <a:srgbClr val="1E293B"/>
-                </a:solidFill>
-                <a:latin typeface="Calibri"/>
-              </a:rPr>
-              <a:t>✓  l</a:t>
-            </a:r>
-          </a:p>
-          <a:p>
-            <a:pPr algn="l">
-              <a:spcAft>
-                <a:spcPts val="300"/>
-              </a:spcAft>
-            </a:pPr>
-            <a:r>
-              <a:rPr sz="850" b="0" i="0">
-                <a:solidFill>
-                  <a:srgbClr val="1E293B"/>
-                </a:solidFill>
-                <a:latin typeface="Calibri"/>
-              </a:rPr>
-              <a:t>✓   </a:t>
-            </a:r>
-          </a:p>
-          <a:p>
-            <a:pPr algn="l">
-              <a:spcAft>
-                <a:spcPts val="300"/>
-              </a:spcAft>
-            </a:pPr>
-            <a:r>
-              <a:rPr sz="850" b="0" i="0">
-                <a:solidFill>
-                  <a:srgbClr val="1E293B"/>
-                </a:solidFill>
-                <a:latin typeface="Calibri"/>
-              </a:rPr>
-              <a:t>✓  t</a:t>
-            </a:r>
-          </a:p>
-          <a:p>
-            <a:pPr algn="l">
-              <a:spcAft>
-                <a:spcPts val="300"/>
-              </a:spcAft>
-            </a:pPr>
-            <a:r>
-              <a:rPr sz="850" b="0" i="0">
-                <a:solidFill>
-                  <a:srgbClr val="1E293B"/>
-                </a:solidFill>
-                <a:latin typeface="Calibri"/>
-              </a:rPr>
-              <a:t>✓  r</a:t>
-            </a:r>
-          </a:p>
-          <a:p>
-            <a:pPr algn="l">
-              <a:spcAft>
-                <a:spcPts val="300"/>
-              </a:spcAft>
-            </a:pPr>
-            <a:r>
-              <a:rPr sz="850" b="0" i="0">
-                <a:solidFill>
-                  <a:srgbClr val="1E293B"/>
-                </a:solidFill>
-                <a:latin typeface="Calibri"/>
-              </a:rPr>
-              <a:t>✓  a</a:t>
-            </a:r>
-          </a:p>
-          <a:p>
-            <a:pPr algn="l">
-              <a:spcAft>
-                <a:spcPts val="300"/>
-              </a:spcAft>
-            </a:pPr>
-            <a:r>
-              <a:rPr sz="850" b="0" i="0">
-                <a:solidFill>
-                  <a:srgbClr val="1E293B"/>
-                </a:solidFill>
-                <a:latin typeface="Calibri"/>
-              </a:rPr>
-              <a:t>✓  i</a:t>
-            </a:r>
-          </a:p>
-          <a:p>
-            <a:pPr algn="l">
-              <a:spcAft>
-                <a:spcPts val="300"/>
-              </a:spcAft>
-            </a:pPr>
-            <a:r>
-              <a:rPr sz="850" b="0" i="0">
-                <a:solidFill>
-                  <a:srgbClr val="1E293B"/>
-                </a:solidFill>
-                <a:latin typeface="Calibri"/>
-              </a:rPr>
-              <a:t>✓  n</a:t>
-            </a:r>
-          </a:p>
-          <a:p>
-            <a:pPr algn="l">
-              <a:spcAft>
-                <a:spcPts val="300"/>
-              </a:spcAft>
-            </a:pPr>
-            <a:r>
-              <a:rPr sz="850" b="0" i="0">
-                <a:solidFill>
-                  <a:srgbClr val="1E293B"/>
-                </a:solidFill>
-                <a:latin typeface="Calibri"/>
-              </a:rPr>
-              <a:t>✓  i</a:t>
-            </a:r>
-          </a:p>
-          <a:p>
-            <a:pPr algn="l">
-              <a:spcAft>
-                <a:spcPts val="300"/>
-              </a:spcAft>
-            </a:pPr>
-            <a:r>
-              <a:rPr sz="850" b="0" i="0">
-                <a:solidFill>
-                  <a:srgbClr val="1E293B"/>
-                </a:solidFill>
-                <a:latin typeface="Calibri"/>
-              </a:rPr>
-              <a:t>✓  n</a:t>
-            </a:r>
-          </a:p>
-          <a:p>
-            <a:pPr algn="l">
-              <a:spcAft>
-                <a:spcPts val="300"/>
-              </a:spcAft>
-            </a:pPr>
-            <a:r>
-              <a:rPr sz="850" b="0" i="0">
-                <a:solidFill>
-                  <a:srgbClr val="1E293B"/>
-                </a:solidFill>
-                <a:latin typeface="Calibri"/>
-              </a:rPr>
-              <a:t>✓  g</a:t>
-            </a:r>
-          </a:p>
-          <a:p>
-            <a:pPr algn="l">
-              <a:spcAft>
-                <a:spcPts val="300"/>
-              </a:spcAft>
-            </a:pPr>
-            <a:r>
-              <a:rPr sz="850" b="0" i="0">
-                <a:solidFill>
-                  <a:srgbClr val="1E293B"/>
-                </a:solidFill>
-                <a:latin typeface="Calibri"/>
-              </a:rPr>
-              <a:t>✓   </a:t>
-            </a:r>
-          </a:p>
-          <a:p>
-            <a:pPr algn="l">
-              <a:spcAft>
-                <a:spcPts val="300"/>
-              </a:spcAft>
-            </a:pPr>
-            <a:r>
-              <a:rPr sz="850" b="0" i="0">
-                <a:solidFill>
-                  <a:srgbClr val="1E293B"/>
-                </a:solidFill>
-                <a:latin typeface="Calibri"/>
-              </a:rPr>
-              <a:t>✓  s</a:t>
-            </a:r>
-          </a:p>
-          <a:p>
-            <a:pPr algn="l">
-              <a:spcAft>
-                <a:spcPts val="300"/>
-              </a:spcAft>
-            </a:pPr>
-            <a:r>
-              <a:rPr sz="850" b="0" i="0">
-                <a:solidFill>
-                  <a:srgbClr val="1E293B"/>
-                </a:solidFill>
-                <a:latin typeface="Calibri"/>
-              </a:rPr>
-              <a:t>✓  c</a:t>
-            </a:r>
-          </a:p>
-          <a:p>
-            <a:pPr algn="l">
-              <a:spcAft>
-                <a:spcPts val="300"/>
-              </a:spcAft>
-            </a:pPr>
-            <a:r>
-              <a:rPr sz="850" b="0" i="0">
-                <a:solidFill>
-                  <a:srgbClr val="1E293B"/>
-                </a:solidFill>
-                <a:latin typeface="Calibri"/>
-              </a:rPr>
-              <a:t>✓  h</a:t>
-            </a:r>
-          </a:p>
-          <a:p>
-            <a:pPr algn="l">
-              <a:spcAft>
-                <a:spcPts val="300"/>
-              </a:spcAft>
-            </a:pPr>
-            <a:r>
-              <a:rPr sz="850" b="0" i="0">
-                <a:solidFill>
-                  <a:srgbClr val="1E293B"/>
-                </a:solidFill>
-                <a:latin typeface="Calibri"/>
-              </a:rPr>
-              <a:t>✓  e</a:t>
-            </a:r>
-          </a:p>
-          <a:p>
-            <a:pPr algn="l">
-              <a:spcAft>
-                <a:spcPts val="300"/>
-              </a:spcAft>
-            </a:pPr>
-            <a:r>
-              <a:rPr sz="850" b="0" i="0">
-                <a:solidFill>
-                  <a:srgbClr val="1E293B"/>
-                </a:solidFill>
-                <a:latin typeface="Calibri"/>
-              </a:rPr>
-              <a:t>✓  d</a:t>
-            </a:r>
-          </a:p>
-          <a:p>
-            <a:pPr algn="l">
-              <a:spcAft>
-                <a:spcPts val="300"/>
-              </a:spcAft>
-            </a:pPr>
-            <a:r>
-              <a:rPr sz="850" b="0" i="0">
-                <a:solidFill>
-                  <a:srgbClr val="1E293B"/>
-                </a:solidFill>
-                <a:latin typeface="Calibri"/>
-              </a:rPr>
-              <a:t>✓  u</a:t>
-            </a:r>
-          </a:p>
-          <a:p>
-            <a:pPr algn="l">
-              <a:spcAft>
-                <a:spcPts val="300"/>
-              </a:spcAft>
-            </a:pPr>
-            <a:r>
-              <a:rPr sz="850" b="0" i="0">
-                <a:solidFill>
-                  <a:srgbClr val="1E293B"/>
-                </a:solidFill>
-                <a:latin typeface="Calibri"/>
-              </a:rPr>
-              <a:t>✓  l</a:t>
-            </a:r>
-          </a:p>
-          <a:p>
-            <a:pPr algn="l">
-              <a:spcAft>
-                <a:spcPts val="300"/>
-              </a:spcAft>
-            </a:pPr>
-            <a:r>
-              <a:rPr sz="850" b="0" i="0">
-                <a:solidFill>
-                  <a:srgbClr val="1E293B"/>
-                </a:solidFill>
-                <a:latin typeface="Calibri"/>
-              </a:rPr>
-              <a:t>✓  e</a:t>
-            </a:r>
-          </a:p>
-          <a:p>
-            <a:pPr algn="l">
-              <a:spcAft>
-                <a:spcPts val="300"/>
-              </a:spcAft>
-            </a:pPr>
-            <a:r>
-              <a:rPr sz="850" b="0" i="0">
-                <a:solidFill>
-                  <a:srgbClr val="1E293B"/>
-                </a:solidFill>
-                <a:latin typeface="Calibri"/>
-              </a:rPr>
-              <a:t>✓  ,</a:t>
-            </a:r>
-          </a:p>
-          <a:p>
-            <a:pPr algn="l">
-              <a:spcAft>
-                <a:spcPts val="300"/>
-              </a:spcAft>
-            </a:pPr>
-            <a:r>
-              <a:rPr sz="850" b="0" i="0">
-                <a:solidFill>
-                  <a:srgbClr val="1E293B"/>
-                </a:solidFill>
-                <a:latin typeface="Calibri"/>
-              </a:rPr>
-              <a:t>✓   </a:t>
-            </a:r>
-          </a:p>
-          <a:p>
-            <a:pPr algn="l">
-              <a:spcAft>
-                <a:spcPts val="300"/>
-              </a:spcAft>
-            </a:pPr>
-            <a:r>
-              <a:rPr sz="850" b="0" i="0">
-                <a:solidFill>
-                  <a:srgbClr val="1E293B"/>
-                </a:solidFill>
-                <a:latin typeface="Calibri"/>
-              </a:rPr>
-              <a:t>✓  s</a:t>
-            </a:r>
-          </a:p>
-          <a:p>
-            <a:pPr algn="l">
-              <a:spcAft>
-                <a:spcPts val="300"/>
-              </a:spcAft>
-            </a:pPr>
-            <a:r>
-              <a:rPr sz="850" b="0" i="0">
-                <a:solidFill>
-                  <a:srgbClr val="1E293B"/>
-                </a:solidFill>
-                <a:latin typeface="Calibri"/>
-              </a:rPr>
-              <a:t>✓  o</a:t>
-            </a:r>
-          </a:p>
-          <a:p>
-            <a:pPr algn="l">
-              <a:spcAft>
-                <a:spcPts val="300"/>
-              </a:spcAft>
-            </a:pPr>
-            <a:r>
-              <a:rPr sz="850" b="0" i="0">
-                <a:solidFill>
-                  <a:srgbClr val="1E293B"/>
-                </a:solidFill>
-                <a:latin typeface="Calibri"/>
-              </a:rPr>
-              <a:t>✓  l</a:t>
-            </a:r>
-          </a:p>
-          <a:p>
-            <a:pPr algn="l">
-              <a:spcAft>
-                <a:spcPts val="300"/>
-              </a:spcAft>
-            </a:pPr>
-            <a:r>
-              <a:rPr sz="850" b="0" i="0">
-                <a:solidFill>
-                  <a:srgbClr val="1E293B"/>
-                </a:solidFill>
-                <a:latin typeface="Calibri"/>
-              </a:rPr>
-              <a:t>✓  u</a:t>
-            </a:r>
-          </a:p>
-          <a:p>
-            <a:pPr algn="l">
-              <a:spcAft>
-                <a:spcPts val="300"/>
-              </a:spcAft>
-            </a:pPr>
-            <a:r>
-              <a:rPr sz="850" b="0" i="0">
-                <a:solidFill>
-                  <a:srgbClr val="1E293B"/>
-                </a:solidFill>
-                <a:latin typeface="Calibri"/>
-              </a:rPr>
-              <a:t>✓  t</a:t>
-            </a:r>
-          </a:p>
-          <a:p>
-            <a:pPr algn="l">
-              <a:spcAft>
-                <a:spcPts val="300"/>
-              </a:spcAft>
-            </a:pPr>
-            <a:r>
-              <a:rPr sz="850" b="0" i="0">
-                <a:solidFill>
-                  <a:srgbClr val="1E293B"/>
-                </a:solidFill>
-                <a:latin typeface="Calibri"/>
-              </a:rPr>
-              <a:t>✓  i</a:t>
-            </a:r>
-          </a:p>
-          <a:p>
-            <a:pPr algn="l">
-              <a:spcAft>
-                <a:spcPts val="300"/>
-              </a:spcAft>
-            </a:pPr>
-            <a:r>
-              <a:rPr sz="850" b="0" i="0">
-                <a:solidFill>
-                  <a:srgbClr val="1E293B"/>
-                </a:solidFill>
-                <a:latin typeface="Calibri"/>
-              </a:rPr>
-              <a:t>✓  o</a:t>
-            </a:r>
-          </a:p>
-          <a:p>
-            <a:pPr algn="l">
-              <a:spcAft>
-                <a:spcPts val="300"/>
-              </a:spcAft>
-            </a:pPr>
-            <a:r>
-              <a:rPr sz="850" b="0" i="0">
-                <a:solidFill>
-                  <a:srgbClr val="1E293B"/>
-                </a:solidFill>
-                <a:latin typeface="Calibri"/>
-              </a:rPr>
-              <a:t>✓  n</a:t>
-            </a:r>
-          </a:p>
-          <a:p>
-            <a:pPr algn="l">
-              <a:spcAft>
-                <a:spcPts val="300"/>
-              </a:spcAft>
-            </a:pPr>
-            <a:r>
-              <a:rPr sz="850" b="0" i="0">
-                <a:solidFill>
-                  <a:srgbClr val="1E293B"/>
-                </a:solidFill>
-                <a:latin typeface="Calibri"/>
-              </a:rPr>
-              <a:t>✓   </a:t>
-            </a:r>
-          </a:p>
-          <a:p>
-            <a:pPr algn="l">
-              <a:spcAft>
-                <a:spcPts val="300"/>
-              </a:spcAft>
-            </a:pPr>
-            <a:r>
-              <a:rPr sz="850" b="0" i="0">
-                <a:solidFill>
-                  <a:srgbClr val="1E293B"/>
-                </a:solidFill>
-                <a:latin typeface="Calibri"/>
-              </a:rPr>
-              <a:t>✓  a</a:t>
-            </a:r>
-          </a:p>
-          <a:p>
-            <a:pPr algn="l">
-              <a:spcAft>
-                <a:spcPts val="300"/>
-              </a:spcAft>
-            </a:pPr>
-            <a:r>
-              <a:rPr sz="850" b="0" i="0">
-                <a:solidFill>
-                  <a:srgbClr val="1E293B"/>
-                </a:solidFill>
-                <a:latin typeface="Calibri"/>
-              </a:rPr>
-              <a:t>✓  c</a:t>
-            </a:r>
-          </a:p>
-          <a:p>
-            <a:pPr algn="l">
-              <a:spcAft>
-                <a:spcPts val="300"/>
-              </a:spcAft>
-            </a:pPr>
-            <a:r>
-              <a:rPr sz="850" b="0" i="0">
-                <a:solidFill>
-                  <a:srgbClr val="1E293B"/>
-                </a:solidFill>
-                <a:latin typeface="Calibri"/>
-              </a:rPr>
-              <a:t>✓  t</a:t>
-            </a:r>
-          </a:p>
-          <a:p>
-            <a:pPr algn="l">
-              <a:spcAft>
-                <a:spcPts val="300"/>
-              </a:spcAft>
-            </a:pPr>
-            <a:r>
-              <a:rPr sz="850" b="0" i="0">
-                <a:solidFill>
-                  <a:srgbClr val="1E293B"/>
-                </a:solidFill>
-                <a:latin typeface="Calibri"/>
-              </a:rPr>
-              <a:t>✓  i</a:t>
-            </a:r>
-          </a:p>
-          <a:p>
-            <a:pPr algn="l">
-              <a:spcAft>
-                <a:spcPts val="300"/>
-              </a:spcAft>
-            </a:pPr>
-            <a:r>
-              <a:rPr sz="850" b="0" i="0">
-                <a:solidFill>
-                  <a:srgbClr val="1E293B"/>
-                </a:solidFill>
-                <a:latin typeface="Calibri"/>
-              </a:rPr>
-              <a:t>✓  v</a:t>
-            </a:r>
-          </a:p>
-          <a:p>
-            <a:pPr algn="l">
-              <a:spcAft>
-                <a:spcPts val="300"/>
-              </a:spcAft>
-            </a:pPr>
-            <a:r>
-              <a:rPr sz="850" b="0" i="0">
-                <a:solidFill>
-                  <a:srgbClr val="1E293B"/>
-                </a:solidFill>
-                <a:latin typeface="Calibri"/>
-              </a:rPr>
-              <a:t>✓  a</a:t>
-            </a:r>
-          </a:p>
-          <a:p>
-            <a:pPr algn="l">
-              <a:spcAft>
-                <a:spcPts val="300"/>
-              </a:spcAft>
-            </a:pPr>
-            <a:r>
-              <a:rPr sz="850" b="0" i="0">
-                <a:solidFill>
-                  <a:srgbClr val="1E293B"/>
-                </a:solidFill>
-                <a:latin typeface="Calibri"/>
-              </a:rPr>
-              <a:t>✓  t</a:t>
-            </a:r>
-          </a:p>
-          <a:p>
-            <a:pPr algn="l">
-              <a:spcAft>
-                <a:spcPts val="300"/>
-              </a:spcAft>
-            </a:pPr>
-            <a:r>
-              <a:rPr sz="850" b="0" i="0">
-                <a:solidFill>
-                  <a:srgbClr val="1E293B"/>
-                </a:solidFill>
-                <a:latin typeface="Calibri"/>
-              </a:rPr>
-              <a:t>✓  i</a:t>
-            </a:r>
-          </a:p>
-          <a:p>
-            <a:pPr algn="l">
-              <a:spcAft>
-                <a:spcPts val="300"/>
-              </a:spcAft>
-            </a:pPr>
-            <a:r>
-              <a:rPr sz="850" b="0" i="0">
-                <a:solidFill>
-                  <a:srgbClr val="1E293B"/>
-                </a:solidFill>
-                <a:latin typeface="Calibri"/>
-              </a:rPr>
-              <a:t>✓  o</a:t>
-            </a:r>
-          </a:p>
-          <a:p>
-            <a:pPr algn="l">
-              <a:spcAft>
-                <a:spcPts val="300"/>
-              </a:spcAft>
-            </a:pPr>
-            <a:r>
-              <a:rPr sz="850" b="0" i="0">
-                <a:solidFill>
-                  <a:srgbClr val="1E293B"/>
-                </a:solidFill>
-                <a:latin typeface="Calibri"/>
-              </a:rPr>
-              <a:t>✓  n</a:t>
+            <a:r>
+              <a:rPr lang="en-US" dirty="0" sz="850">
+                <a:solidFill>
+                  <a:srgbClr val="16A34A"/>
+                </a:solidFill>
+                <a:latin typeface="Calibri"/>
+              </a:rPr>
+              <a:t>✓  </a:t>
+            </a:r>
+            <a:r>
+              <a:rPr lang="en-US" dirty="0" sz="850">
+                <a:solidFill>
+                  <a:srgbClr val="1A1A1A"/>
+                </a:solidFill>
+                <a:latin typeface="Calibri"/>
+              </a:rPr>
+              <a:t>Solution definitions</a:t>
+            </a:r>
+          </a:p>
+          <a:p>
+            <a:r>
+              <a:rPr lang="en-US" dirty="0" sz="850">
+                <a:solidFill>
+                  <a:srgbClr val="16A34A"/>
+                </a:solidFill>
+                <a:latin typeface="Calibri"/>
+              </a:rPr>
+              <a:t>✓  </a:t>
+            </a:r>
+            <a:r>
+              <a:rPr lang="en-US" dirty="0" sz="850">
+                <a:solidFill>
+                  <a:srgbClr val="1A1A1A"/>
+                </a:solidFill>
+                <a:latin typeface="Calibri"/>
+              </a:rPr>
+              <a:t>training data filters</a:t>
+            </a:r>
+          </a:p>
+          <a:p>
+            <a:r>
+              <a:rPr lang="en-US" dirty="0" sz="850">
+                <a:solidFill>
+                  <a:srgbClr val="16A34A"/>
+                </a:solidFill>
+                <a:latin typeface="Calibri"/>
+              </a:rPr>
+              <a:t>✓  </a:t>
+            </a:r>
+            <a:r>
+              <a:rPr lang="en-US" dirty="0" sz="850">
+                <a:solidFill>
+                  <a:srgbClr val="1A1A1A"/>
+                </a:solidFill>
+                <a:latin typeface="Calibri"/>
+              </a:rPr>
+              <a:t>confidence thresholds</a:t>
+            </a:r>
+          </a:p>
+          <a:p>
+            <a:r>
+              <a:rPr lang="en-US" dirty="0" sz="850">
+                <a:solidFill>
+                  <a:srgbClr val="16A34A"/>
+                </a:solidFill>
+                <a:latin typeface="Calibri"/>
+              </a:rPr>
+              <a:t>✓  </a:t>
+            </a:r>
+            <a:r>
+              <a:rPr lang="en-US" dirty="0" sz="850">
+                <a:solidFill>
+                  <a:srgbClr val="1A1A1A"/>
+                </a:solidFill>
+                <a:latin typeface="Calibri"/>
+              </a:rPr>
+              <a:t>feedback configuration</a:t>
+            </a:r>
+          </a:p>
+          <a:p>
+            <a:r>
+              <a:rPr lang="en-US" dirty="0" sz="850">
+                <a:solidFill>
+                  <a:srgbClr val="16A34A"/>
+                </a:solidFill>
+                <a:latin typeface="Calibri"/>
+              </a:rPr>
+              <a:t>✓  </a:t>
+            </a:r>
+            <a:r>
+              <a:rPr lang="en-US" dirty="0" sz="850">
+                <a:solidFill>
+                  <a:srgbClr val="1A1A1A"/>
+                </a:solidFill>
+                <a:latin typeface="Calibri"/>
+              </a:rPr>
+              <a:t>model training schedule</a:t>
+            </a:r>
+          </a:p>
+          <a:p>
+            <a:r>
+              <a:rPr lang="en-US" dirty="0" sz="850">
+                <a:solidFill>
+                  <a:srgbClr val="16A34A"/>
+                </a:solidFill>
+                <a:latin typeface="Calibri"/>
+              </a:rPr>
+              <a:t>✓  </a:t>
+            </a:r>
+            <a:r>
+              <a:rPr lang="en-US" dirty="0" sz="850">
+                <a:solidFill>
+                  <a:srgbClr val="1A1A1A"/>
+                </a:solidFill>
+                <a:latin typeface="Calibri"/>
+              </a:rPr>
+              <a:t>solution activation</a:t>
             </a:r>
           </a:p>
         </p:txBody>
@@ -14522,2499 +12466,63 @@
           </a:bodyPr>
           <a:lstStyle/>
           <a:p>
-            <a:pPr algn="l">
-              <a:spcAft>
-                <a:spcPts val="300"/>
-              </a:spcAft>
-            </a:pPr>
-            <a:r>
-              <a:rPr sz="850" b="0" i="0">
-                <a:solidFill>
-                  <a:srgbClr val="1E293B"/>
-                </a:solidFill>
-                <a:latin typeface="Calibri"/>
-              </a:rPr>
-              <a:t>✗  C</a:t>
-            </a:r>
-          </a:p>
-          <a:p>
-            <a:pPr algn="l">
-              <a:spcAft>
-                <a:spcPts val="300"/>
-              </a:spcAft>
-            </a:pPr>
-            <a:r>
-              <a:rPr sz="850" b="0" i="0">
-                <a:solidFill>
-                  <a:srgbClr val="1E293B"/>
-                </a:solidFill>
-                <a:latin typeface="Calibri"/>
-              </a:rPr>
-              <a:t>✗  u</a:t>
-            </a:r>
-          </a:p>
-          <a:p>
-            <a:pPr algn="l">
-              <a:spcAft>
-                <a:spcPts val="300"/>
-              </a:spcAft>
-            </a:pPr>
-            <a:r>
-              <a:rPr sz="850" b="0" i="0">
-                <a:solidFill>
-                  <a:srgbClr val="1E293B"/>
-                </a:solidFill>
-                <a:latin typeface="Calibri"/>
-              </a:rPr>
-              <a:t>✗  s</a:t>
-            </a:r>
-          </a:p>
-          <a:p>
-            <a:pPr algn="l">
-              <a:spcAft>
-                <a:spcPts val="300"/>
-              </a:spcAft>
-            </a:pPr>
-            <a:r>
-              <a:rPr sz="850" b="0" i="0">
-                <a:solidFill>
-                  <a:srgbClr val="1E293B"/>
-                </a:solidFill>
-                <a:latin typeface="Calibri"/>
-              </a:rPr>
-              <a:t>✗  t</a:t>
-            </a:r>
-          </a:p>
-          <a:p>
-            <a:pPr algn="l">
-              <a:spcAft>
-                <a:spcPts val="300"/>
-              </a:spcAft>
-            </a:pPr>
-            <a:r>
-              <a:rPr sz="850" b="0" i="0">
-                <a:solidFill>
-                  <a:srgbClr val="1E293B"/>
-                </a:solidFill>
-                <a:latin typeface="Calibri"/>
-              </a:rPr>
-              <a:t>✗  o</a:t>
-            </a:r>
-          </a:p>
-          <a:p>
-            <a:pPr algn="l">
-              <a:spcAft>
-                <a:spcPts val="300"/>
-              </a:spcAft>
-            </a:pPr>
-            <a:r>
-              <a:rPr sz="850" b="0" i="0">
-                <a:solidFill>
-                  <a:srgbClr val="1E293B"/>
-                </a:solidFill>
-                <a:latin typeface="Calibri"/>
-              </a:rPr>
-              <a:t>✗  m</a:t>
-            </a:r>
-          </a:p>
-          <a:p>
-            <a:pPr algn="l">
-              <a:spcAft>
-                <a:spcPts val="300"/>
-              </a:spcAft>
-            </a:pPr>
-            <a:r>
-              <a:rPr sz="850" b="0" i="0">
-                <a:solidFill>
-                  <a:srgbClr val="1E293B"/>
-                </a:solidFill>
-                <a:latin typeface="Calibri"/>
-              </a:rPr>
-              <a:t>✗   </a:t>
-            </a:r>
-          </a:p>
-          <a:p>
-            <a:pPr algn="l">
-              <a:spcAft>
-                <a:spcPts val="300"/>
-              </a:spcAft>
-            </a:pPr>
-            <a:r>
-              <a:rPr sz="850" b="0" i="0">
-                <a:solidFill>
-                  <a:srgbClr val="1E293B"/>
-                </a:solidFill>
-                <a:latin typeface="Calibri"/>
-              </a:rPr>
-              <a:t>✗  M</a:t>
-            </a:r>
-          </a:p>
-          <a:p>
-            <a:pPr algn="l">
-              <a:spcAft>
-                <a:spcPts val="300"/>
-              </a:spcAft>
-            </a:pPr>
-            <a:r>
-              <a:rPr sz="850" b="0" i="0">
-                <a:solidFill>
-                  <a:srgbClr val="1E293B"/>
-                </a:solidFill>
-                <a:latin typeface="Calibri"/>
-              </a:rPr>
-              <a:t>✗  L</a:t>
-            </a:r>
-          </a:p>
-          <a:p>
-            <a:pPr algn="l">
-              <a:spcAft>
-                <a:spcPts val="300"/>
-              </a:spcAft>
-            </a:pPr>
-            <a:r>
-              <a:rPr sz="850" b="0" i="0">
-                <a:solidFill>
-                  <a:srgbClr val="1E293B"/>
-                </a:solidFill>
-                <a:latin typeface="Calibri"/>
-              </a:rPr>
-              <a:t>✗   </a:t>
-            </a:r>
-          </a:p>
-          <a:p>
-            <a:pPr algn="l">
-              <a:spcAft>
-                <a:spcPts val="300"/>
-              </a:spcAft>
-            </a:pPr>
-            <a:r>
-              <a:rPr sz="850" b="0" i="0">
-                <a:solidFill>
-                  <a:srgbClr val="1E293B"/>
-                </a:solidFill>
-                <a:latin typeface="Calibri"/>
-              </a:rPr>
-              <a:t>✗  m</a:t>
-            </a:r>
-          </a:p>
-          <a:p>
-            <a:pPr algn="l">
-              <a:spcAft>
-                <a:spcPts val="300"/>
-              </a:spcAft>
-            </a:pPr>
-            <a:r>
-              <a:rPr sz="850" b="0" i="0">
-                <a:solidFill>
-                  <a:srgbClr val="1E293B"/>
-                </a:solidFill>
-                <a:latin typeface="Calibri"/>
-              </a:rPr>
-              <a:t>✗  o</a:t>
-            </a:r>
-          </a:p>
-          <a:p>
-            <a:pPr algn="l">
-              <a:spcAft>
-                <a:spcPts val="300"/>
-              </a:spcAft>
-            </a:pPr>
-            <a:r>
-              <a:rPr sz="850" b="0" i="0">
-                <a:solidFill>
-                  <a:srgbClr val="1E293B"/>
-                </a:solidFill>
-                <a:latin typeface="Calibri"/>
-              </a:rPr>
-              <a:t>✗  d</a:t>
-            </a:r>
-          </a:p>
-          <a:p>
-            <a:pPr algn="l">
-              <a:spcAft>
-                <a:spcPts val="300"/>
-              </a:spcAft>
-            </a:pPr>
-            <a:r>
-              <a:rPr sz="850" b="0" i="0">
-                <a:solidFill>
-                  <a:srgbClr val="1E293B"/>
-                </a:solidFill>
-                <a:latin typeface="Calibri"/>
-              </a:rPr>
-              <a:t>✗  e</a:t>
-            </a:r>
-          </a:p>
-          <a:p>
-            <a:pPr algn="l">
-              <a:spcAft>
-                <a:spcPts val="300"/>
-              </a:spcAft>
-            </a:pPr>
-            <a:r>
-              <a:rPr sz="850" b="0" i="0">
-                <a:solidFill>
-                  <a:srgbClr val="1E293B"/>
-                </a:solidFill>
-                <a:latin typeface="Calibri"/>
-              </a:rPr>
-              <a:t>✗  l</a:t>
-            </a:r>
-          </a:p>
-          <a:p>
-            <a:pPr algn="l">
-              <a:spcAft>
-                <a:spcPts val="300"/>
-              </a:spcAft>
-            </a:pPr>
-            <a:r>
-              <a:rPr sz="850" b="0" i="0">
-                <a:solidFill>
-                  <a:srgbClr val="1E293B"/>
-                </a:solidFill>
-                <a:latin typeface="Calibri"/>
-              </a:rPr>
-              <a:t>✗  s</a:t>
-            </a:r>
-          </a:p>
-          <a:p>
-            <a:pPr algn="l">
-              <a:spcAft>
-                <a:spcPts val="300"/>
-              </a:spcAft>
-            </a:pPr>
-            <a:r>
-              <a:rPr sz="850" b="0" i="0">
-                <a:solidFill>
-                  <a:srgbClr val="1E293B"/>
-                </a:solidFill>
-                <a:latin typeface="Calibri"/>
-              </a:rPr>
-              <a:t>✗   </a:t>
-            </a:r>
-          </a:p>
-          <a:p>
-            <a:pPr algn="l">
-              <a:spcAft>
-                <a:spcPts val="300"/>
-              </a:spcAft>
-            </a:pPr>
-            <a:r>
-              <a:rPr sz="850" b="0" i="0">
-                <a:solidFill>
-                  <a:srgbClr val="1E293B"/>
-                </a:solidFill>
-                <a:latin typeface="Calibri"/>
-              </a:rPr>
-              <a:t>✗  f</a:t>
-            </a:r>
-          </a:p>
-          <a:p>
-            <a:pPr algn="l">
-              <a:spcAft>
-                <a:spcPts val="300"/>
-              </a:spcAft>
-            </a:pPr>
-            <a:r>
-              <a:rPr sz="850" b="0" i="0">
-                <a:solidFill>
-                  <a:srgbClr val="1E293B"/>
-                </a:solidFill>
-                <a:latin typeface="Calibri"/>
-              </a:rPr>
-              <a:t>✗  o</a:t>
-            </a:r>
-          </a:p>
-          <a:p>
-            <a:pPr algn="l">
-              <a:spcAft>
-                <a:spcPts val="300"/>
-              </a:spcAft>
-            </a:pPr>
-            <a:r>
-              <a:rPr sz="850" b="0" i="0">
-                <a:solidFill>
-                  <a:srgbClr val="1E293B"/>
-                </a:solidFill>
-                <a:latin typeface="Calibri"/>
-              </a:rPr>
-              <a:t>✗  r</a:t>
-            </a:r>
-          </a:p>
-          <a:p>
-            <a:pPr algn="l">
-              <a:spcAft>
-                <a:spcPts val="300"/>
-              </a:spcAft>
-            </a:pPr>
-            <a:r>
-              <a:rPr sz="850" b="0" i="0">
-                <a:solidFill>
-                  <a:srgbClr val="1E293B"/>
-                </a:solidFill>
-                <a:latin typeface="Calibri"/>
-              </a:rPr>
-              <a:t>✗   </a:t>
-            </a:r>
-          </a:p>
-          <a:p>
-            <a:pPr algn="l">
-              <a:spcAft>
-                <a:spcPts val="300"/>
-              </a:spcAft>
-            </a:pPr>
-            <a:r>
-              <a:rPr sz="850" b="0" i="0">
-                <a:solidFill>
-                  <a:srgbClr val="1E293B"/>
-                </a:solidFill>
-                <a:latin typeface="Calibri"/>
-              </a:rPr>
-              <a:t>✗  p</a:t>
-            </a:r>
-          </a:p>
-          <a:p>
-            <a:pPr algn="l">
-              <a:spcAft>
-                <a:spcPts val="300"/>
-              </a:spcAft>
-            </a:pPr>
-            <a:r>
-              <a:rPr sz="850" b="0" i="0">
-                <a:solidFill>
-                  <a:srgbClr val="1E293B"/>
-                </a:solidFill>
-                <a:latin typeface="Calibri"/>
-              </a:rPr>
-              <a:t>✗  r</a:t>
-            </a:r>
-          </a:p>
-          <a:p>
-            <a:pPr algn="l">
-              <a:spcAft>
-                <a:spcPts val="300"/>
-              </a:spcAft>
-            </a:pPr>
-            <a:r>
-              <a:rPr sz="850" b="0" i="0">
-                <a:solidFill>
-                  <a:srgbClr val="1E293B"/>
-                </a:solidFill>
-                <a:latin typeface="Calibri"/>
-              </a:rPr>
-              <a:t>✗  o</a:t>
-            </a:r>
-          </a:p>
-          <a:p>
-            <a:pPr algn="l">
-              <a:spcAft>
-                <a:spcPts val="300"/>
-              </a:spcAft>
-            </a:pPr>
-            <a:r>
-              <a:rPr sz="850" b="0" i="0">
-                <a:solidFill>
-                  <a:srgbClr val="1E293B"/>
-                </a:solidFill>
-                <a:latin typeface="Calibri"/>
-              </a:rPr>
-              <a:t>✗  b</a:t>
-            </a:r>
-          </a:p>
-          <a:p>
-            <a:pPr algn="l">
-              <a:spcAft>
-                <a:spcPts val="300"/>
-              </a:spcAft>
-            </a:pPr>
-            <a:r>
-              <a:rPr sz="850" b="0" i="0">
-                <a:solidFill>
-                  <a:srgbClr val="1E293B"/>
-                </a:solidFill>
-                <a:latin typeface="Calibri"/>
-              </a:rPr>
-              <a:t>✗  l</a:t>
-            </a:r>
-          </a:p>
-          <a:p>
-            <a:pPr algn="l">
-              <a:spcAft>
-                <a:spcPts val="300"/>
-              </a:spcAft>
-            </a:pPr>
-            <a:r>
-              <a:rPr sz="850" b="0" i="0">
-                <a:solidFill>
-                  <a:srgbClr val="1E293B"/>
-                </a:solidFill>
-                <a:latin typeface="Calibri"/>
-              </a:rPr>
-              <a:t>✗  e</a:t>
-            </a:r>
-          </a:p>
-          <a:p>
-            <a:pPr algn="l">
-              <a:spcAft>
-                <a:spcPts val="300"/>
-              </a:spcAft>
-            </a:pPr>
-            <a:r>
-              <a:rPr sz="850" b="0" i="0">
-                <a:solidFill>
-                  <a:srgbClr val="1E293B"/>
-                </a:solidFill>
-                <a:latin typeface="Calibri"/>
-              </a:rPr>
-              <a:t>✗  m</a:t>
-            </a:r>
-          </a:p>
-          <a:p>
-            <a:pPr algn="l">
-              <a:spcAft>
-                <a:spcPts val="300"/>
-              </a:spcAft>
-            </a:pPr>
-            <a:r>
-              <a:rPr sz="850" b="0" i="0">
-                <a:solidFill>
-                  <a:srgbClr val="1E293B"/>
-                </a:solidFill>
-                <a:latin typeface="Calibri"/>
-              </a:rPr>
-              <a:t>✗  s</a:t>
-            </a:r>
-          </a:p>
-          <a:p>
-            <a:pPr algn="l">
-              <a:spcAft>
-                <a:spcPts val="300"/>
-              </a:spcAft>
-            </a:pPr>
-            <a:r>
-              <a:rPr sz="850" b="0" i="0">
-                <a:solidFill>
-                  <a:srgbClr val="1E293B"/>
-                </a:solidFill>
-                <a:latin typeface="Calibri"/>
-              </a:rPr>
-              <a:t>✗   </a:t>
-            </a:r>
-          </a:p>
-          <a:p>
-            <a:pPr algn="l">
-              <a:spcAft>
-                <a:spcPts val="300"/>
-              </a:spcAft>
-            </a:pPr>
-            <a:r>
-              <a:rPr sz="850" b="0" i="0">
-                <a:solidFill>
-                  <a:srgbClr val="1E293B"/>
-                </a:solidFill>
-                <a:latin typeface="Calibri"/>
-              </a:rPr>
-              <a:t>✗  s</a:t>
-            </a:r>
-          </a:p>
-          <a:p>
-            <a:pPr algn="l">
-              <a:spcAft>
-                <a:spcPts val="300"/>
-              </a:spcAft>
-            </a:pPr>
-            <a:r>
-              <a:rPr sz="850" b="0" i="0">
-                <a:solidFill>
-                  <a:srgbClr val="1E293B"/>
-                </a:solidFill>
-                <a:latin typeface="Calibri"/>
-              </a:rPr>
-              <a:t>✗  o</a:t>
-            </a:r>
-          </a:p>
-          <a:p>
-            <a:pPr algn="l">
-              <a:spcAft>
-                <a:spcPts val="300"/>
-              </a:spcAft>
-            </a:pPr>
-            <a:r>
-              <a:rPr sz="850" b="0" i="0">
-                <a:solidFill>
-                  <a:srgbClr val="1E293B"/>
-                </a:solidFill>
-                <a:latin typeface="Calibri"/>
-              </a:rPr>
-              <a:t>✗  l</a:t>
-            </a:r>
-          </a:p>
-          <a:p>
-            <a:pPr algn="l">
-              <a:spcAft>
-                <a:spcPts val="300"/>
-              </a:spcAft>
-            </a:pPr>
-            <a:r>
-              <a:rPr sz="850" b="0" i="0">
-                <a:solidFill>
-                  <a:srgbClr val="1E293B"/>
-                </a:solidFill>
-                <a:latin typeface="Calibri"/>
-              </a:rPr>
-              <a:t>✗  v</a:t>
-            </a:r>
-          </a:p>
-          <a:p>
-            <a:pPr algn="l">
-              <a:spcAft>
-                <a:spcPts val="300"/>
-              </a:spcAft>
-            </a:pPr>
-            <a:r>
-              <a:rPr sz="850" b="0" i="0">
-                <a:solidFill>
-                  <a:srgbClr val="1E293B"/>
-                </a:solidFill>
-                <a:latin typeface="Calibri"/>
-              </a:rPr>
-              <a:t>✗  a</a:t>
-            </a:r>
-          </a:p>
-          <a:p>
-            <a:pPr algn="l">
-              <a:spcAft>
-                <a:spcPts val="300"/>
-              </a:spcAft>
-            </a:pPr>
-            <a:r>
-              <a:rPr sz="850" b="0" i="0">
-                <a:solidFill>
-                  <a:srgbClr val="1E293B"/>
-                </a:solidFill>
-                <a:latin typeface="Calibri"/>
-              </a:rPr>
-              <a:t>✗  b</a:t>
-            </a:r>
-          </a:p>
-          <a:p>
-            <a:pPr algn="l">
-              <a:spcAft>
-                <a:spcPts val="300"/>
-              </a:spcAft>
-            </a:pPr>
-            <a:r>
-              <a:rPr sz="850" b="0" i="0">
-                <a:solidFill>
-                  <a:srgbClr val="1E293B"/>
-                </a:solidFill>
-                <a:latin typeface="Calibri"/>
-              </a:rPr>
-              <a:t>✗  l</a:t>
-            </a:r>
-          </a:p>
-          <a:p>
-            <a:pPr algn="l">
-              <a:spcAft>
-                <a:spcPts val="300"/>
-              </a:spcAft>
-            </a:pPr>
-            <a:r>
-              <a:rPr sz="850" b="0" i="0">
-                <a:solidFill>
-                  <a:srgbClr val="1E293B"/>
-                </a:solidFill>
-                <a:latin typeface="Calibri"/>
-              </a:rPr>
-              <a:t>✗  e</a:t>
-            </a:r>
-          </a:p>
-          <a:p>
-            <a:pPr algn="l">
-              <a:spcAft>
-                <a:spcPts val="300"/>
-              </a:spcAft>
-            </a:pPr>
-            <a:r>
-              <a:rPr sz="850" b="0" i="0">
-                <a:solidFill>
-                  <a:srgbClr val="1E293B"/>
-                </a:solidFill>
-                <a:latin typeface="Calibri"/>
-              </a:rPr>
-              <a:t>✗   </a:t>
-            </a:r>
-          </a:p>
-          <a:p>
-            <a:pPr algn="l">
-              <a:spcAft>
-                <a:spcPts val="300"/>
-              </a:spcAft>
-            </a:pPr>
-            <a:r>
-              <a:rPr sz="850" b="0" i="0">
-                <a:solidFill>
-                  <a:srgbClr val="1E293B"/>
-                </a:solidFill>
-                <a:latin typeface="Calibri"/>
-              </a:rPr>
-              <a:t>✗  b</a:t>
-            </a:r>
-          </a:p>
-          <a:p>
-            <a:pPr algn="l">
-              <a:spcAft>
-                <a:spcPts val="300"/>
-              </a:spcAft>
-            </a:pPr>
-            <a:r>
-              <a:rPr sz="850" b="0" i="0">
-                <a:solidFill>
-                  <a:srgbClr val="1E293B"/>
-                </a:solidFill>
-                <a:latin typeface="Calibri"/>
-              </a:rPr>
-              <a:t>✗  y</a:t>
-            </a:r>
-          </a:p>
-          <a:p>
-            <a:pPr algn="l">
-              <a:spcAft>
-                <a:spcPts val="300"/>
-              </a:spcAft>
-            </a:pPr>
-            <a:r>
-              <a:rPr sz="850" b="0" i="0">
-                <a:solidFill>
-                  <a:srgbClr val="1E293B"/>
-                </a:solidFill>
-                <a:latin typeface="Calibri"/>
-              </a:rPr>
-              <a:t>✗   </a:t>
-            </a:r>
-          </a:p>
-          <a:p>
-            <a:pPr algn="l">
-              <a:spcAft>
-                <a:spcPts val="300"/>
-              </a:spcAft>
-            </a:pPr>
-            <a:r>
-              <a:rPr sz="850" b="0" i="0">
-                <a:solidFill>
-                  <a:srgbClr val="1E293B"/>
-                </a:solidFill>
-                <a:latin typeface="Calibri"/>
-              </a:rPr>
-              <a:t>✗  O</a:t>
-            </a:r>
-          </a:p>
-          <a:p>
-            <a:pPr algn="l">
-              <a:spcAft>
-                <a:spcPts val="300"/>
-              </a:spcAft>
-            </a:pPr>
-            <a:r>
-              <a:rPr sz="850" b="0" i="0">
-                <a:solidFill>
-                  <a:srgbClr val="1E293B"/>
-                </a:solidFill>
-                <a:latin typeface="Calibri"/>
-              </a:rPr>
-              <a:t>✗  O</a:t>
-            </a:r>
-          </a:p>
-          <a:p>
-            <a:pPr algn="l">
-              <a:spcAft>
-                <a:spcPts val="300"/>
-              </a:spcAft>
-            </a:pPr>
-            <a:r>
-              <a:rPr sz="850" b="0" i="0">
-                <a:solidFill>
-                  <a:srgbClr val="1E293B"/>
-                </a:solidFill>
-                <a:latin typeface="Calibri"/>
-              </a:rPr>
-              <a:t>✗  T</a:t>
-            </a:r>
-          </a:p>
-          <a:p>
-            <a:pPr algn="l">
-              <a:spcAft>
-                <a:spcPts val="300"/>
-              </a:spcAft>
-            </a:pPr>
-            <a:r>
-              <a:rPr sz="850" b="0" i="0">
-                <a:solidFill>
-                  <a:srgbClr val="1E293B"/>
-                </a:solidFill>
-                <a:latin typeface="Calibri"/>
-              </a:rPr>
-              <a:t>✗  B</a:t>
-            </a:r>
-          </a:p>
-          <a:p>
-            <a:pPr algn="l">
-              <a:spcAft>
-                <a:spcPts val="300"/>
-              </a:spcAft>
-            </a:pPr>
-            <a:r>
-              <a:rPr sz="850" b="0" i="0">
-                <a:solidFill>
-                  <a:srgbClr val="1E293B"/>
-                </a:solidFill>
-                <a:latin typeface="Calibri"/>
-              </a:rPr>
-              <a:t>✗   </a:t>
-            </a:r>
-          </a:p>
-          <a:p>
-            <a:pPr algn="l">
-              <a:spcAft>
-                <a:spcPts val="300"/>
-              </a:spcAft>
-            </a:pPr>
-            <a:r>
-              <a:rPr sz="850" b="0" i="0">
-                <a:solidFill>
-                  <a:srgbClr val="1E293B"/>
-                </a:solidFill>
-                <a:latin typeface="Calibri"/>
-              </a:rPr>
-              <a:t>✗  P</a:t>
-            </a:r>
-          </a:p>
-          <a:p>
-            <a:pPr algn="l">
-              <a:spcAft>
-                <a:spcPts val="300"/>
-              </a:spcAft>
-            </a:pPr>
-            <a:r>
-              <a:rPr sz="850" b="0" i="0">
-                <a:solidFill>
-                  <a:srgbClr val="1E293B"/>
-                </a:solidFill>
-                <a:latin typeface="Calibri"/>
-              </a:rPr>
-              <a:t>✗  I</a:t>
-            </a:r>
-          </a:p>
-          <a:p>
-            <a:pPr algn="l">
-              <a:spcAft>
-                <a:spcPts val="300"/>
-              </a:spcAft>
-            </a:pPr>
-            <a:r>
-              <a:rPr sz="850" b="0" i="0">
-                <a:solidFill>
-                  <a:srgbClr val="1E293B"/>
-                </a:solidFill>
-                <a:latin typeface="Calibri"/>
-              </a:rPr>
-              <a:t>✗   </a:t>
-            </a:r>
-          </a:p>
-          <a:p>
-            <a:pPr algn="l">
-              <a:spcAft>
-                <a:spcPts val="300"/>
-              </a:spcAft>
-            </a:pPr>
-            <a:r>
-              <a:rPr sz="850" b="0" i="0">
-                <a:solidFill>
-                  <a:srgbClr val="1E293B"/>
-                </a:solidFill>
-                <a:latin typeface="Calibri"/>
-              </a:rPr>
-              <a:t>✗  c</a:t>
-            </a:r>
-          </a:p>
-          <a:p>
-            <a:pPr algn="l">
-              <a:spcAft>
-                <a:spcPts val="300"/>
-              </a:spcAft>
-            </a:pPr>
-            <a:r>
-              <a:rPr sz="850" b="0" i="0">
-                <a:solidFill>
-                  <a:srgbClr val="1E293B"/>
-                </a:solidFill>
-                <a:latin typeface="Calibri"/>
-              </a:rPr>
-              <a:t>✗  l</a:t>
-            </a:r>
-          </a:p>
-          <a:p>
-            <a:pPr algn="l">
-              <a:spcAft>
-                <a:spcPts val="300"/>
-              </a:spcAft>
-            </a:pPr>
-            <a:r>
-              <a:rPr sz="850" b="0" i="0">
-                <a:solidFill>
-                  <a:srgbClr val="1E293B"/>
-                </a:solidFill>
-                <a:latin typeface="Calibri"/>
-              </a:rPr>
-              <a:t>✗  a</a:t>
-            </a:r>
-          </a:p>
-          <a:p>
-            <a:pPr algn="l">
-              <a:spcAft>
-                <a:spcPts val="300"/>
-              </a:spcAft>
-            </a:pPr>
-            <a:r>
-              <a:rPr sz="850" b="0" i="0">
-                <a:solidFill>
-                  <a:srgbClr val="1E293B"/>
-                </a:solidFill>
-                <a:latin typeface="Calibri"/>
-              </a:rPr>
-              <a:t>✗  s</a:t>
-            </a:r>
-          </a:p>
-          <a:p>
-            <a:pPr algn="l">
-              <a:spcAft>
-                <a:spcPts val="300"/>
-              </a:spcAft>
-            </a:pPr>
-            <a:r>
-              <a:rPr sz="850" b="0" i="0">
-                <a:solidFill>
-                  <a:srgbClr val="1E293B"/>
-                </a:solidFill>
-                <a:latin typeface="Calibri"/>
-              </a:rPr>
-              <a:t>✗  s</a:t>
-            </a:r>
-          </a:p>
-          <a:p>
-            <a:pPr algn="l">
-              <a:spcAft>
-                <a:spcPts val="300"/>
-              </a:spcAft>
-            </a:pPr>
-            <a:r>
-              <a:rPr sz="850" b="0" i="0">
-                <a:solidFill>
-                  <a:srgbClr val="1E293B"/>
-                </a:solidFill>
-                <a:latin typeface="Calibri"/>
-              </a:rPr>
-              <a:t>✗  i</a:t>
-            </a:r>
-          </a:p>
-          <a:p>
-            <a:pPr algn="l">
-              <a:spcAft>
-                <a:spcPts val="300"/>
-              </a:spcAft>
-            </a:pPr>
-            <a:r>
-              <a:rPr sz="850" b="0" i="0">
-                <a:solidFill>
-                  <a:srgbClr val="1E293B"/>
-                </a:solidFill>
-                <a:latin typeface="Calibri"/>
-              </a:rPr>
-              <a:t>✗  f</a:t>
-            </a:r>
-          </a:p>
-          <a:p>
-            <a:pPr algn="l">
-              <a:spcAft>
-                <a:spcPts val="300"/>
-              </a:spcAft>
-            </a:pPr>
-            <a:r>
-              <a:rPr sz="850" b="0" i="0">
-                <a:solidFill>
-                  <a:srgbClr val="1E293B"/>
-                </a:solidFill>
-                <a:latin typeface="Calibri"/>
-              </a:rPr>
-              <a:t>✗  i</a:t>
-            </a:r>
-          </a:p>
-          <a:p>
-            <a:pPr algn="l">
-              <a:spcAft>
-                <a:spcPts val="300"/>
-              </a:spcAft>
-            </a:pPr>
-            <a:r>
-              <a:rPr sz="850" b="0" i="0">
-                <a:solidFill>
-                  <a:srgbClr val="1E293B"/>
-                </a:solidFill>
-                <a:latin typeface="Calibri"/>
-              </a:rPr>
-              <a:t>✗  c</a:t>
-            </a:r>
-          </a:p>
-          <a:p>
-            <a:pPr algn="l">
-              <a:spcAft>
-                <a:spcPts val="300"/>
-              </a:spcAft>
-            </a:pPr>
-            <a:r>
-              <a:rPr sz="850" b="0" i="0">
-                <a:solidFill>
-                  <a:srgbClr val="1E293B"/>
-                </a:solidFill>
-                <a:latin typeface="Calibri"/>
-              </a:rPr>
-              <a:t>✗  a</a:t>
-            </a:r>
-          </a:p>
-          <a:p>
-            <a:pPr algn="l">
-              <a:spcAft>
-                <a:spcPts val="300"/>
-              </a:spcAft>
-            </a:pPr>
-            <a:r>
-              <a:rPr sz="850" b="0" i="0">
-                <a:solidFill>
-                  <a:srgbClr val="1E293B"/>
-                </a:solidFill>
-                <a:latin typeface="Calibri"/>
-              </a:rPr>
-              <a:t>✗  t</a:t>
-            </a:r>
-          </a:p>
-          <a:p>
-            <a:pPr algn="l">
-              <a:spcAft>
-                <a:spcPts val="300"/>
-              </a:spcAft>
-            </a:pPr>
-            <a:r>
-              <a:rPr sz="850" b="0" i="0">
-                <a:solidFill>
-                  <a:srgbClr val="1E293B"/>
-                </a:solidFill>
-                <a:latin typeface="Calibri"/>
-              </a:rPr>
-              <a:t>✗  i</a:t>
-            </a:r>
-          </a:p>
-          <a:p>
-            <a:pPr algn="l">
-              <a:spcAft>
-                <a:spcPts val="300"/>
-              </a:spcAft>
-            </a:pPr>
-            <a:r>
-              <a:rPr sz="850" b="0" i="0">
-                <a:solidFill>
-                  <a:srgbClr val="1E293B"/>
-                </a:solidFill>
-                <a:latin typeface="Calibri"/>
-              </a:rPr>
-              <a:t>✗  o</a:t>
-            </a:r>
-          </a:p>
-          <a:p>
-            <a:pPr algn="l">
-              <a:spcAft>
-                <a:spcPts val="300"/>
-              </a:spcAft>
-            </a:pPr>
-            <a:r>
-              <a:rPr sz="850" b="0" i="0">
-                <a:solidFill>
-                  <a:srgbClr val="1E293B"/>
-                </a:solidFill>
-                <a:latin typeface="Calibri"/>
-              </a:rPr>
-              <a:t>✗  n</a:t>
-            </a:r>
-          </a:p>
-          <a:p>
-            <a:pPr algn="l">
-              <a:spcAft>
-                <a:spcPts val="300"/>
-              </a:spcAft>
-            </a:pPr>
-            <a:r>
-              <a:rPr sz="850" b="0" i="0">
-                <a:solidFill>
-                  <a:srgbClr val="1E293B"/>
-                </a:solidFill>
-                <a:latin typeface="Calibri"/>
-              </a:rPr>
-              <a:t>✗  /</a:t>
-            </a:r>
-          </a:p>
-          <a:p>
-            <a:pPr algn="l">
-              <a:spcAft>
-                <a:spcPts val="300"/>
-              </a:spcAft>
-            </a:pPr>
-            <a:r>
-              <a:rPr sz="850" b="0" i="0">
-                <a:solidFill>
-                  <a:srgbClr val="1E293B"/>
-                </a:solidFill>
-                <a:latin typeface="Calibri"/>
-              </a:rPr>
-              <a:t>✗  s</a:t>
-            </a:r>
-          </a:p>
-          <a:p>
-            <a:pPr algn="l">
-              <a:spcAft>
-                <a:spcPts val="300"/>
-              </a:spcAft>
-            </a:pPr>
-            <a:r>
-              <a:rPr sz="850" b="0" i="0">
-                <a:solidFill>
-                  <a:srgbClr val="1E293B"/>
-                </a:solidFill>
-                <a:latin typeface="Calibri"/>
-              </a:rPr>
-              <a:t>✗  i</a:t>
-            </a:r>
-          </a:p>
-          <a:p>
-            <a:pPr algn="l">
-              <a:spcAft>
-                <a:spcPts val="300"/>
-              </a:spcAft>
-            </a:pPr>
-            <a:r>
-              <a:rPr sz="850" b="0" i="0">
-                <a:solidFill>
-                  <a:srgbClr val="1E293B"/>
-                </a:solidFill>
-                <a:latin typeface="Calibri"/>
-              </a:rPr>
-              <a:t>✗  m</a:t>
-            </a:r>
-          </a:p>
-          <a:p>
-            <a:pPr algn="l">
-              <a:spcAft>
-                <a:spcPts val="300"/>
-              </a:spcAft>
-            </a:pPr>
-            <a:r>
-              <a:rPr sz="850" b="0" i="0">
-                <a:solidFill>
-                  <a:srgbClr val="1E293B"/>
-                </a:solidFill>
-                <a:latin typeface="Calibri"/>
-              </a:rPr>
-              <a:t>✗  i</a:t>
-            </a:r>
-          </a:p>
-          <a:p>
-            <a:pPr algn="l">
-              <a:spcAft>
-                <a:spcPts val="300"/>
-              </a:spcAft>
-            </a:pPr>
-            <a:r>
-              <a:rPr sz="850" b="0" i="0">
-                <a:solidFill>
-                  <a:srgbClr val="1E293B"/>
-                </a:solidFill>
-                <a:latin typeface="Calibri"/>
-              </a:rPr>
-              <a:t>✗  l</a:t>
-            </a:r>
-          </a:p>
-          <a:p>
-            <a:pPr algn="l">
-              <a:spcAft>
-                <a:spcPts val="300"/>
-              </a:spcAft>
-            </a:pPr>
-            <a:r>
-              <a:rPr sz="850" b="0" i="0">
-                <a:solidFill>
-                  <a:srgbClr val="1E293B"/>
-                </a:solidFill>
-                <a:latin typeface="Calibri"/>
-              </a:rPr>
-              <a:t>✗  a</a:t>
-            </a:r>
-          </a:p>
-          <a:p>
-            <a:pPr algn="l">
-              <a:spcAft>
-                <a:spcPts val="300"/>
-              </a:spcAft>
-            </a:pPr>
-            <a:r>
-              <a:rPr sz="850" b="0" i="0">
-                <a:solidFill>
-                  <a:srgbClr val="1E293B"/>
-                </a:solidFill>
-                <a:latin typeface="Calibri"/>
-              </a:rPr>
-              <a:t>✗  r</a:t>
-            </a:r>
-          </a:p>
-          <a:p>
-            <a:pPr algn="l">
-              <a:spcAft>
-                <a:spcPts val="300"/>
-              </a:spcAft>
-            </a:pPr>
-            <a:r>
-              <a:rPr sz="850" b="0" i="0">
-                <a:solidFill>
-                  <a:srgbClr val="1E293B"/>
-                </a:solidFill>
-                <a:latin typeface="Calibri"/>
-              </a:rPr>
-              <a:t>✗  i</a:t>
-            </a:r>
-          </a:p>
-          <a:p>
-            <a:pPr algn="l">
-              <a:spcAft>
-                <a:spcPts val="300"/>
-              </a:spcAft>
-            </a:pPr>
-            <a:r>
-              <a:rPr sz="850" b="0" i="0">
-                <a:solidFill>
-                  <a:srgbClr val="1E293B"/>
-                </a:solidFill>
-                <a:latin typeface="Calibri"/>
-              </a:rPr>
-              <a:t>✗  t</a:t>
-            </a:r>
-          </a:p>
-          <a:p>
-            <a:pPr algn="l">
-              <a:spcAft>
-                <a:spcPts val="300"/>
-              </a:spcAft>
-            </a:pPr>
-            <a:r>
-              <a:rPr sz="850" b="0" i="0">
-                <a:solidFill>
-                  <a:srgbClr val="1E293B"/>
-                </a:solidFill>
-                <a:latin typeface="Calibri"/>
-              </a:rPr>
-              <a:t>✗  y</a:t>
-            </a:r>
-          </a:p>
-          <a:p>
-            <a:pPr algn="l">
-              <a:spcAft>
-                <a:spcPts val="300"/>
-              </a:spcAft>
-            </a:pPr>
-            <a:r>
-              <a:rPr sz="850" b="0" i="0">
-                <a:solidFill>
-                  <a:srgbClr val="1E293B"/>
-                </a:solidFill>
-                <a:latin typeface="Calibri"/>
-              </a:rPr>
-              <a:t>✗  ,</a:t>
-            </a:r>
-          </a:p>
-          <a:p>
-            <a:pPr algn="l">
-              <a:spcAft>
-                <a:spcPts val="300"/>
-              </a:spcAft>
-            </a:pPr>
-            <a:r>
-              <a:rPr sz="850" b="0" i="0">
-                <a:solidFill>
-                  <a:srgbClr val="1E293B"/>
-                </a:solidFill>
-                <a:latin typeface="Calibri"/>
-              </a:rPr>
-              <a:t>✗   </a:t>
-            </a:r>
-          </a:p>
-          <a:p>
-            <a:pPr algn="l">
-              <a:spcAft>
-                <a:spcPts val="300"/>
-              </a:spcAft>
-            </a:pPr>
-            <a:r>
-              <a:rPr sz="850" b="0" i="0">
-                <a:solidFill>
-                  <a:srgbClr val="1E293B"/>
-                </a:solidFill>
-                <a:latin typeface="Calibri"/>
-              </a:rPr>
-              <a:t>✗  e</a:t>
-            </a:r>
-          </a:p>
-          <a:p>
-            <a:pPr algn="l">
-              <a:spcAft>
-                <a:spcPts val="300"/>
-              </a:spcAft>
-            </a:pPr>
-            <a:r>
-              <a:rPr sz="850" b="0" i="0">
-                <a:solidFill>
-                  <a:srgbClr val="1E293B"/>
-                </a:solidFill>
-                <a:latin typeface="Calibri"/>
-              </a:rPr>
-              <a:t>✗  x</a:t>
-            </a:r>
-          </a:p>
-          <a:p>
-            <a:pPr algn="l">
-              <a:spcAft>
-                <a:spcPts val="300"/>
-              </a:spcAft>
-            </a:pPr>
-            <a:r>
-              <a:rPr sz="850" b="0" i="0">
-                <a:solidFill>
-                  <a:srgbClr val="1E293B"/>
-                </a:solidFill>
-                <a:latin typeface="Calibri"/>
-              </a:rPr>
-              <a:t>✗  t</a:t>
-            </a:r>
-          </a:p>
-          <a:p>
-            <a:pPr algn="l">
-              <a:spcAft>
-                <a:spcPts val="300"/>
-              </a:spcAft>
-            </a:pPr>
-            <a:r>
-              <a:rPr sz="850" b="0" i="0">
-                <a:solidFill>
-                  <a:srgbClr val="1E293B"/>
-                </a:solidFill>
-                <a:latin typeface="Calibri"/>
-              </a:rPr>
-              <a:t>✗  e</a:t>
-            </a:r>
-          </a:p>
-          <a:p>
-            <a:pPr algn="l">
-              <a:spcAft>
-                <a:spcPts val="300"/>
-              </a:spcAft>
-            </a:pPr>
-            <a:r>
-              <a:rPr sz="850" b="0" i="0">
-                <a:solidFill>
-                  <a:srgbClr val="1E293B"/>
-                </a:solidFill>
-                <a:latin typeface="Calibri"/>
-              </a:rPr>
-              <a:t>✗  r</a:t>
-            </a:r>
-          </a:p>
-          <a:p>
-            <a:pPr algn="l">
-              <a:spcAft>
-                <a:spcPts val="300"/>
-              </a:spcAft>
-            </a:pPr>
-            <a:r>
-              <a:rPr sz="850" b="0" i="0">
-                <a:solidFill>
-                  <a:srgbClr val="1E293B"/>
-                </a:solidFill>
-                <a:latin typeface="Calibri"/>
-              </a:rPr>
-              <a:t>✗  n</a:t>
-            </a:r>
-          </a:p>
-          <a:p>
-            <a:pPr algn="l">
-              <a:spcAft>
-                <a:spcPts val="300"/>
-              </a:spcAft>
-            </a:pPr>
-            <a:r>
-              <a:rPr sz="850" b="0" i="0">
-                <a:solidFill>
-                  <a:srgbClr val="1E293B"/>
-                </a:solidFill>
-                <a:latin typeface="Calibri"/>
-              </a:rPr>
-              <a:t>✗  a</a:t>
-            </a:r>
-          </a:p>
-          <a:p>
-            <a:pPr algn="l">
-              <a:spcAft>
-                <a:spcPts val="300"/>
-              </a:spcAft>
-            </a:pPr>
-            <a:r>
-              <a:rPr sz="850" b="0" i="0">
-                <a:solidFill>
-                  <a:srgbClr val="1E293B"/>
-                </a:solidFill>
-                <a:latin typeface="Calibri"/>
-              </a:rPr>
-              <a:t>✗  l</a:t>
-            </a:r>
-          </a:p>
-          <a:p>
-            <a:pPr algn="l">
-              <a:spcAft>
-                <a:spcPts val="300"/>
-              </a:spcAft>
-            </a:pPr>
-            <a:r>
-              <a:rPr sz="850" b="0" i="0">
-                <a:solidFill>
-                  <a:srgbClr val="1E293B"/>
-                </a:solidFill>
-                <a:latin typeface="Calibri"/>
-              </a:rPr>
-              <a:t>✗   </a:t>
-            </a:r>
-          </a:p>
-          <a:p>
-            <a:pPr algn="l">
-              <a:spcAft>
-                <a:spcPts val="300"/>
-              </a:spcAft>
-            </a:pPr>
-            <a:r>
-              <a:rPr sz="850" b="0" i="0">
-                <a:solidFill>
-                  <a:srgbClr val="1E293B"/>
-                </a:solidFill>
-                <a:latin typeface="Calibri"/>
-              </a:rPr>
-              <a:t>✗  M</a:t>
-            </a:r>
-          </a:p>
-          <a:p>
-            <a:pPr algn="l">
-              <a:spcAft>
-                <a:spcPts val="300"/>
-              </a:spcAft>
-            </a:pPr>
-            <a:r>
-              <a:rPr sz="850" b="0" i="0">
-                <a:solidFill>
-                  <a:srgbClr val="1E293B"/>
-                </a:solidFill>
-                <a:latin typeface="Calibri"/>
-              </a:rPr>
-              <a:t>✗  L</a:t>
-            </a:r>
-          </a:p>
-          <a:p>
-            <a:pPr algn="l">
-              <a:spcAft>
-                <a:spcPts val="300"/>
-              </a:spcAft>
-            </a:pPr>
-            <a:r>
-              <a:rPr sz="850" b="0" i="0">
-                <a:solidFill>
-                  <a:srgbClr val="1E293B"/>
-                </a:solidFill>
-                <a:latin typeface="Calibri"/>
-              </a:rPr>
-              <a:t>✗   </a:t>
-            </a:r>
-          </a:p>
-          <a:p>
-            <a:pPr algn="l">
-              <a:spcAft>
-                <a:spcPts val="300"/>
-              </a:spcAft>
-            </a:pPr>
-            <a:r>
-              <a:rPr sz="850" b="0" i="0">
-                <a:solidFill>
-                  <a:srgbClr val="1E293B"/>
-                </a:solidFill>
-                <a:latin typeface="Calibri"/>
-              </a:rPr>
-              <a:t>✗  p</a:t>
-            </a:r>
-          </a:p>
-          <a:p>
-            <a:pPr algn="l">
-              <a:spcAft>
-                <a:spcPts val="300"/>
-              </a:spcAft>
-            </a:pPr>
-            <a:r>
-              <a:rPr sz="850" b="0" i="0">
-                <a:solidFill>
-                  <a:srgbClr val="1E293B"/>
-                </a:solidFill>
-                <a:latin typeface="Calibri"/>
-              </a:rPr>
-              <a:t>✗  l</a:t>
-            </a:r>
-          </a:p>
-          <a:p>
-            <a:pPr algn="l">
-              <a:spcAft>
-                <a:spcPts val="300"/>
-              </a:spcAft>
-            </a:pPr>
-            <a:r>
-              <a:rPr sz="850" b="0" i="0">
-                <a:solidFill>
-                  <a:srgbClr val="1E293B"/>
-                </a:solidFill>
-                <a:latin typeface="Calibri"/>
-              </a:rPr>
-              <a:t>✗  a</a:t>
-            </a:r>
-          </a:p>
-          <a:p>
-            <a:pPr algn="l">
-              <a:spcAft>
-                <a:spcPts val="300"/>
-              </a:spcAft>
-            </a:pPr>
-            <a:r>
-              <a:rPr sz="850" b="0" i="0">
-                <a:solidFill>
-                  <a:srgbClr val="1E293B"/>
-                </a:solidFill>
-                <a:latin typeface="Calibri"/>
-              </a:rPr>
-              <a:t>✗  t</a:t>
-            </a:r>
-          </a:p>
-          <a:p>
-            <a:pPr algn="l">
-              <a:spcAft>
-                <a:spcPts val="300"/>
-              </a:spcAft>
-            </a:pPr>
-            <a:r>
-              <a:rPr sz="850" b="0" i="0">
-                <a:solidFill>
-                  <a:srgbClr val="1E293B"/>
-                </a:solidFill>
-                <a:latin typeface="Calibri"/>
-              </a:rPr>
-              <a:t>✗  f</a:t>
-            </a:r>
-          </a:p>
-          <a:p>
-            <a:pPr algn="l">
-              <a:spcAft>
-                <a:spcPts val="300"/>
-              </a:spcAft>
-            </a:pPr>
-            <a:r>
-              <a:rPr sz="850" b="0" i="0">
-                <a:solidFill>
-                  <a:srgbClr val="1E293B"/>
-                </a:solidFill>
-                <a:latin typeface="Calibri"/>
-              </a:rPr>
-              <a:t>✗  o</a:t>
-            </a:r>
-          </a:p>
-          <a:p>
-            <a:pPr algn="l">
-              <a:spcAft>
-                <a:spcPts val="300"/>
-              </a:spcAft>
-            </a:pPr>
-            <a:r>
-              <a:rPr sz="850" b="0" i="0">
-                <a:solidFill>
-                  <a:srgbClr val="1E293B"/>
-                </a:solidFill>
-                <a:latin typeface="Calibri"/>
-              </a:rPr>
-              <a:t>✗  r</a:t>
-            </a:r>
-          </a:p>
-          <a:p>
-            <a:pPr algn="l">
-              <a:spcAft>
-                <a:spcPts val="300"/>
-              </a:spcAft>
-            </a:pPr>
-            <a:r>
-              <a:rPr sz="850" b="0" i="0">
-                <a:solidFill>
-                  <a:srgbClr val="1E293B"/>
-                </a:solidFill>
-                <a:latin typeface="Calibri"/>
-              </a:rPr>
-              <a:t>✗  m</a:t>
-            </a:r>
-          </a:p>
-          <a:p>
-            <a:pPr algn="l">
-              <a:spcAft>
-                <a:spcPts val="300"/>
-              </a:spcAft>
-            </a:pPr>
-            <a:r>
-              <a:rPr sz="850" b="0" i="0">
-                <a:solidFill>
-                  <a:srgbClr val="1E293B"/>
-                </a:solidFill>
-                <a:latin typeface="Calibri"/>
-              </a:rPr>
-              <a:t>✗  s</a:t>
-            </a:r>
-          </a:p>
-          <a:p>
-            <a:pPr algn="l">
-              <a:spcAft>
-                <a:spcPts val="300"/>
-              </a:spcAft>
-            </a:pPr>
-            <a:r>
-              <a:rPr sz="850" b="0" i="0">
-                <a:solidFill>
-                  <a:srgbClr val="1E293B"/>
-                </a:solidFill>
-                <a:latin typeface="Calibri"/>
-              </a:rPr>
-              <a:t>✗   </a:t>
-            </a:r>
-          </a:p>
-          <a:p>
-            <a:pPr algn="l">
-              <a:spcAft>
-                <a:spcPts val="300"/>
-              </a:spcAft>
-            </a:pPr>
-            <a:r>
-              <a:rPr sz="850" b="0" i="0">
-                <a:solidFill>
-                  <a:srgbClr val="1E293B"/>
-                </a:solidFill>
-                <a:latin typeface="Calibri"/>
-              </a:rPr>
-              <a:t>✗  f</a:t>
-            </a:r>
-          </a:p>
-          <a:p>
-            <a:pPr algn="l">
-              <a:spcAft>
-                <a:spcPts val="300"/>
-              </a:spcAft>
-            </a:pPr>
-            <a:r>
-              <a:rPr sz="850" b="0" i="0">
-                <a:solidFill>
-                  <a:srgbClr val="1E293B"/>
-                </a:solidFill>
-                <a:latin typeface="Calibri"/>
-              </a:rPr>
-              <a:t>✗  o</a:t>
-            </a:r>
-          </a:p>
-          <a:p>
-            <a:pPr algn="l">
-              <a:spcAft>
-                <a:spcPts val="300"/>
-              </a:spcAft>
-            </a:pPr>
-            <a:r>
-              <a:rPr sz="850" b="0" i="0">
-                <a:solidFill>
-                  <a:srgbClr val="1E293B"/>
-                </a:solidFill>
-                <a:latin typeface="Calibri"/>
-              </a:rPr>
-              <a:t>✗  r</a:t>
-            </a:r>
-          </a:p>
-          <a:p>
-            <a:pPr algn="l">
-              <a:spcAft>
-                <a:spcPts val="300"/>
-              </a:spcAft>
-            </a:pPr>
-            <a:r>
-              <a:rPr sz="850" b="0" i="0">
-                <a:solidFill>
-                  <a:srgbClr val="1E293B"/>
-                </a:solidFill>
-                <a:latin typeface="Calibri"/>
-              </a:rPr>
-              <a:t>✗   </a:t>
-            </a:r>
-          </a:p>
-          <a:p>
-            <a:pPr algn="l">
-              <a:spcAft>
-                <a:spcPts val="300"/>
-              </a:spcAft>
-            </a:pPr>
-            <a:r>
-              <a:rPr sz="850" b="0" i="0">
-                <a:solidFill>
-                  <a:srgbClr val="1E293B"/>
-                </a:solidFill>
-                <a:latin typeface="Calibri"/>
-              </a:rPr>
-              <a:t>✗  d</a:t>
-            </a:r>
-          </a:p>
-          <a:p>
-            <a:pPr algn="l">
-              <a:spcAft>
-                <a:spcPts val="300"/>
-              </a:spcAft>
-            </a:pPr>
-            <a:r>
-              <a:rPr sz="850" b="0" i="0">
-                <a:solidFill>
-                  <a:srgbClr val="1E293B"/>
-                </a:solidFill>
-                <a:latin typeface="Calibri"/>
-              </a:rPr>
-              <a:t>✗  a</a:t>
-            </a:r>
-          </a:p>
-          <a:p>
-            <a:pPr algn="l">
-              <a:spcAft>
-                <a:spcPts val="300"/>
-              </a:spcAft>
-            </a:pPr>
-            <a:r>
-              <a:rPr sz="850" b="0" i="0">
-                <a:solidFill>
-                  <a:srgbClr val="1E293B"/>
-                </a:solidFill>
-                <a:latin typeface="Calibri"/>
-              </a:rPr>
-              <a:t>✗  t</a:t>
-            </a:r>
-          </a:p>
-          <a:p>
-            <a:pPr algn="l">
-              <a:spcAft>
-                <a:spcPts val="300"/>
-              </a:spcAft>
-            </a:pPr>
-            <a:r>
-              <a:rPr sz="850" b="0" i="0">
-                <a:solidFill>
-                  <a:srgbClr val="1E293B"/>
-                </a:solidFill>
-                <a:latin typeface="Calibri"/>
-              </a:rPr>
-              <a:t>✗  a</a:t>
-            </a:r>
-          </a:p>
-          <a:p>
-            <a:pPr algn="l">
-              <a:spcAft>
-                <a:spcPts val="300"/>
-              </a:spcAft>
-            </a:pPr>
-            <a:r>
-              <a:rPr sz="850" b="0" i="0">
-                <a:solidFill>
-                  <a:srgbClr val="1E293B"/>
-                </a:solidFill>
-                <a:latin typeface="Calibri"/>
-              </a:rPr>
-              <a:t>✗   </a:t>
-            </a:r>
-          </a:p>
-          <a:p>
-            <a:pPr algn="l">
-              <a:spcAft>
-                <a:spcPts val="300"/>
-              </a:spcAft>
-            </a:pPr>
-            <a:r>
-              <a:rPr sz="850" b="0" i="0">
-                <a:solidFill>
-                  <a:srgbClr val="1E293B"/>
-                </a:solidFill>
-                <a:latin typeface="Calibri"/>
-              </a:rPr>
-              <a:t>✗  a</a:t>
-            </a:r>
-          </a:p>
-          <a:p>
-            <a:pPr algn="l">
-              <a:spcAft>
-                <a:spcPts val="300"/>
-              </a:spcAft>
-            </a:pPr>
-            <a:r>
-              <a:rPr sz="850" b="0" i="0">
-                <a:solidFill>
-                  <a:srgbClr val="1E293B"/>
-                </a:solidFill>
-                <a:latin typeface="Calibri"/>
-              </a:rPr>
-              <a:t>✗  l</a:t>
-            </a:r>
-          </a:p>
-          <a:p>
-            <a:pPr algn="l">
-              <a:spcAft>
-                <a:spcPts val="300"/>
-              </a:spcAft>
-            </a:pPr>
-            <a:r>
-              <a:rPr sz="850" b="0" i="0">
-                <a:solidFill>
-                  <a:srgbClr val="1E293B"/>
-                </a:solidFill>
-                <a:latin typeface="Calibri"/>
-              </a:rPr>
-              <a:t>✗  r</a:t>
-            </a:r>
-          </a:p>
-          <a:p>
-            <a:pPr algn="l">
-              <a:spcAft>
-                <a:spcPts val="300"/>
-              </a:spcAft>
-            </a:pPr>
-            <a:r>
-              <a:rPr sz="850" b="0" i="0">
-                <a:solidFill>
-                  <a:srgbClr val="1E293B"/>
-                </a:solidFill>
-                <a:latin typeface="Calibri"/>
-              </a:rPr>
-              <a:t>✗  e</a:t>
-            </a:r>
-          </a:p>
-          <a:p>
-            <a:pPr algn="l">
-              <a:spcAft>
-                <a:spcPts val="300"/>
-              </a:spcAft>
-            </a:pPr>
-            <a:r>
-              <a:rPr sz="850" b="0" i="0">
-                <a:solidFill>
-                  <a:srgbClr val="1E293B"/>
-                </a:solidFill>
-                <a:latin typeface="Calibri"/>
-              </a:rPr>
-              <a:t>✗  a</a:t>
-            </a:r>
-          </a:p>
-          <a:p>
-            <a:pPr algn="l">
-              <a:spcAft>
-                <a:spcPts val="300"/>
-              </a:spcAft>
-            </a:pPr>
-            <a:r>
-              <a:rPr sz="850" b="0" i="0">
-                <a:solidFill>
-                  <a:srgbClr val="1E293B"/>
-                </a:solidFill>
-                <a:latin typeface="Calibri"/>
-              </a:rPr>
-              <a:t>✗  d</a:t>
-            </a:r>
-          </a:p>
-          <a:p>
-            <a:pPr algn="l">
-              <a:spcAft>
-                <a:spcPts val="300"/>
-              </a:spcAft>
-            </a:pPr>
-            <a:r>
-              <a:rPr sz="850" b="0" i="0">
-                <a:solidFill>
-                  <a:srgbClr val="1E293B"/>
-                </a:solidFill>
-                <a:latin typeface="Calibri"/>
-              </a:rPr>
-              <a:t>✗  y</a:t>
-            </a:r>
-          </a:p>
-          <a:p>
-            <a:pPr algn="l">
-              <a:spcAft>
-                <a:spcPts val="300"/>
-              </a:spcAft>
-            </a:pPr>
-            <a:r>
-              <a:rPr sz="850" b="0" i="0">
-                <a:solidFill>
-                  <a:srgbClr val="1E293B"/>
-                </a:solidFill>
-                <a:latin typeface="Calibri"/>
-              </a:rPr>
-              <a:t>✗   </a:t>
-            </a:r>
-          </a:p>
-          <a:p>
-            <a:pPr algn="l">
-              <a:spcAft>
-                <a:spcPts val="300"/>
-              </a:spcAft>
-            </a:pPr>
-            <a:r>
-              <a:rPr sz="850" b="0" i="0">
-                <a:solidFill>
-                  <a:srgbClr val="1E293B"/>
-                </a:solidFill>
-                <a:latin typeface="Calibri"/>
-              </a:rPr>
-              <a:t>✗  i</a:t>
-            </a:r>
-          </a:p>
-          <a:p>
-            <a:pPr algn="l">
-              <a:spcAft>
-                <a:spcPts val="300"/>
-              </a:spcAft>
-            </a:pPr>
-            <a:r>
-              <a:rPr sz="850" b="0" i="0">
-                <a:solidFill>
-                  <a:srgbClr val="1E293B"/>
-                </a:solidFill>
-                <a:latin typeface="Calibri"/>
-              </a:rPr>
-              <a:t>✗  n</a:t>
-            </a:r>
-          </a:p>
-          <a:p>
-            <a:pPr algn="l">
-              <a:spcAft>
-                <a:spcPts val="300"/>
-              </a:spcAft>
-            </a:pPr>
-            <a:r>
-              <a:rPr sz="850" b="0" i="0">
-                <a:solidFill>
-                  <a:srgbClr val="1E293B"/>
-                </a:solidFill>
-                <a:latin typeface="Calibri"/>
-              </a:rPr>
-              <a:t>✗   </a:t>
-            </a:r>
-          </a:p>
-          <a:p>
-            <a:pPr algn="l">
-              <a:spcAft>
-                <a:spcPts val="300"/>
-              </a:spcAft>
-            </a:pPr>
-            <a:r>
-              <a:rPr sz="850" b="0" i="0">
-                <a:solidFill>
-                  <a:srgbClr val="1E293B"/>
-                </a:solidFill>
-                <a:latin typeface="Calibri"/>
-              </a:rPr>
-              <a:t>✗  S</a:t>
-            </a:r>
-          </a:p>
-          <a:p>
-            <a:pPr algn="l">
-              <a:spcAft>
-                <a:spcPts val="300"/>
-              </a:spcAft>
-            </a:pPr>
-            <a:r>
-              <a:rPr sz="850" b="0" i="0">
-                <a:solidFill>
-                  <a:srgbClr val="1E293B"/>
-                </a:solidFill>
-                <a:latin typeface="Calibri"/>
-              </a:rPr>
-              <a:t>✗  e</a:t>
-            </a:r>
-          </a:p>
-          <a:p>
-            <a:pPr algn="l">
-              <a:spcAft>
-                <a:spcPts val="300"/>
-              </a:spcAft>
-            </a:pPr>
-            <a:r>
-              <a:rPr sz="850" b="0" i="0">
-                <a:solidFill>
-                  <a:srgbClr val="1E293B"/>
-                </a:solidFill>
-                <a:latin typeface="Calibri"/>
-              </a:rPr>
-              <a:t>✗  r</a:t>
-            </a:r>
-          </a:p>
-          <a:p>
-            <a:pPr algn="l">
-              <a:spcAft>
-                <a:spcPts val="300"/>
-              </a:spcAft>
-            </a:pPr>
-            <a:r>
-              <a:rPr sz="850" b="0" i="0">
-                <a:solidFill>
-                  <a:srgbClr val="1E293B"/>
-                </a:solidFill>
-                <a:latin typeface="Calibri"/>
-              </a:rPr>
-              <a:t>✗  v</a:t>
-            </a:r>
-          </a:p>
-          <a:p>
-            <a:pPr algn="l">
-              <a:spcAft>
-                <a:spcPts val="300"/>
-              </a:spcAft>
-            </a:pPr>
-            <a:r>
-              <a:rPr sz="850" b="0" i="0">
-                <a:solidFill>
-                  <a:srgbClr val="1E293B"/>
-                </a:solidFill>
-                <a:latin typeface="Calibri"/>
-              </a:rPr>
-              <a:t>✗  i</a:t>
-            </a:r>
-          </a:p>
-          <a:p>
-            <a:pPr algn="l">
-              <a:spcAft>
-                <a:spcPts val="300"/>
-              </a:spcAft>
-            </a:pPr>
-            <a:r>
-              <a:rPr sz="850" b="0" i="0">
-                <a:solidFill>
-                  <a:srgbClr val="1E293B"/>
-                </a:solidFill>
-                <a:latin typeface="Calibri"/>
-              </a:rPr>
-              <a:t>✗  c</a:t>
-            </a:r>
-          </a:p>
-          <a:p>
-            <a:pPr algn="l">
-              <a:spcAft>
-                <a:spcPts val="300"/>
-              </a:spcAft>
-            </a:pPr>
-            <a:r>
-              <a:rPr sz="850" b="0" i="0">
-                <a:solidFill>
-                  <a:srgbClr val="1E293B"/>
-                </a:solidFill>
-                <a:latin typeface="Calibri"/>
-              </a:rPr>
-              <a:t>✗  e</a:t>
-            </a:r>
-          </a:p>
-          <a:p>
-            <a:pPr algn="l">
-              <a:spcAft>
-                <a:spcPts val="300"/>
-              </a:spcAft>
-            </a:pPr>
-            <a:r>
-              <a:rPr sz="850" b="0" i="0">
-                <a:solidFill>
-                  <a:srgbClr val="1E293B"/>
-                </a:solidFill>
-                <a:latin typeface="Calibri"/>
-              </a:rPr>
-              <a:t>✗  N</a:t>
-            </a:r>
-          </a:p>
-          <a:p>
-            <a:pPr algn="l">
-              <a:spcAft>
-                <a:spcPts val="300"/>
-              </a:spcAft>
-            </a:pPr>
-            <a:r>
-              <a:rPr sz="850" b="0" i="0">
-                <a:solidFill>
-                  <a:srgbClr val="1E293B"/>
-                </a:solidFill>
-                <a:latin typeface="Calibri"/>
-              </a:rPr>
-              <a:t>✗  o</a:t>
-            </a:r>
-          </a:p>
-          <a:p>
-            <a:pPr algn="l">
-              <a:spcAft>
-                <a:spcPts val="300"/>
-              </a:spcAft>
-            </a:pPr>
-            <a:r>
-              <a:rPr sz="850" b="0" i="0">
-                <a:solidFill>
-                  <a:srgbClr val="1E293B"/>
-                </a:solidFill>
-                <a:latin typeface="Calibri"/>
-              </a:rPr>
-              <a:t>✗  w</a:t>
-            </a:r>
-          </a:p>
-          <a:p>
-            <a:pPr algn="l">
-              <a:spcAft>
-                <a:spcPts val="300"/>
-              </a:spcAft>
-            </a:pPr>
-            <a:r>
-              <a:rPr sz="850" b="0" i="0">
-                <a:solidFill>
-                  <a:srgbClr val="1E293B"/>
-                </a:solidFill>
-                <a:latin typeface="Calibri"/>
-              </a:rPr>
-              <a:t>✗  ,</a:t>
-            </a:r>
-          </a:p>
-          <a:p>
-            <a:pPr algn="l">
-              <a:spcAft>
-                <a:spcPts val="300"/>
-              </a:spcAft>
-            </a:pPr>
-            <a:r>
-              <a:rPr sz="850" b="0" i="0">
-                <a:solidFill>
-                  <a:srgbClr val="1E293B"/>
-                </a:solidFill>
-                <a:latin typeface="Calibri"/>
-              </a:rPr>
-              <a:t>✗   </a:t>
-            </a:r>
-          </a:p>
-          <a:p>
-            <a:pPr algn="l">
-              <a:spcAft>
-                <a:spcPts val="300"/>
-              </a:spcAft>
-            </a:pPr>
-            <a:r>
-              <a:rPr sz="850" b="0" i="0">
-                <a:solidFill>
-                  <a:srgbClr val="1E293B"/>
-                </a:solidFill>
-                <a:latin typeface="Calibri"/>
-              </a:rPr>
-              <a:t>✗  s</a:t>
-            </a:r>
-          </a:p>
-          <a:p>
-            <a:pPr algn="l">
-              <a:spcAft>
-                <a:spcPts val="300"/>
-              </a:spcAft>
-            </a:pPr>
-            <a:r>
-              <a:rPr sz="850" b="0" i="0">
-                <a:solidFill>
-                  <a:srgbClr val="1E293B"/>
-                </a:solidFill>
-                <a:latin typeface="Calibri"/>
-              </a:rPr>
-              <a:t>✗  c</a:t>
-            </a:r>
-          </a:p>
-          <a:p>
-            <a:pPr algn="l">
-              <a:spcAft>
-                <a:spcPts val="300"/>
-              </a:spcAft>
-            </a:pPr>
-            <a:r>
-              <a:rPr sz="850" b="0" i="0">
-                <a:solidFill>
-                  <a:srgbClr val="1E293B"/>
-                </a:solidFill>
-                <a:latin typeface="Calibri"/>
-              </a:rPr>
-              <a:t>✗  r</a:t>
-            </a:r>
-          </a:p>
-          <a:p>
-            <a:pPr algn="l">
-              <a:spcAft>
-                <a:spcPts val="300"/>
-              </a:spcAft>
-            </a:pPr>
-            <a:r>
-              <a:rPr sz="850" b="0" i="0">
-                <a:solidFill>
-                  <a:srgbClr val="1E293B"/>
-                </a:solidFill>
-                <a:latin typeface="Calibri"/>
-              </a:rPr>
-              <a:t>✗  i</a:t>
-            </a:r>
-          </a:p>
-          <a:p>
-            <a:pPr algn="l">
-              <a:spcAft>
-                <a:spcPts val="300"/>
-              </a:spcAft>
-            </a:pPr>
-            <a:r>
-              <a:rPr sz="850" b="0" i="0">
-                <a:solidFill>
-                  <a:srgbClr val="1E293B"/>
-                </a:solidFill>
-                <a:latin typeface="Calibri"/>
-              </a:rPr>
-              <a:t>✗  p</a:t>
-            </a:r>
-          </a:p>
-          <a:p>
-            <a:pPr algn="l">
-              <a:spcAft>
-                <a:spcPts val="300"/>
-              </a:spcAft>
-            </a:pPr>
-            <a:r>
-              <a:rPr sz="850" b="0" i="0">
-                <a:solidFill>
-                  <a:srgbClr val="1E293B"/>
-                </a:solidFill>
-                <a:latin typeface="Calibri"/>
-              </a:rPr>
-              <a:t>✗  t</a:t>
-            </a:r>
-          </a:p>
-          <a:p>
-            <a:pPr algn="l">
-              <a:spcAft>
-                <a:spcPts val="300"/>
-              </a:spcAft>
-            </a:pPr>
-            <a:r>
-              <a:rPr sz="850" b="0" i="0">
-                <a:solidFill>
-                  <a:srgbClr val="1E293B"/>
-                </a:solidFill>
-                <a:latin typeface="Calibri"/>
-              </a:rPr>
-              <a:t>✗  e</a:t>
-            </a:r>
-          </a:p>
-          <a:p>
-            <a:pPr algn="l">
-              <a:spcAft>
-                <a:spcPts val="300"/>
-              </a:spcAft>
-            </a:pPr>
-            <a:r>
-              <a:rPr sz="850" b="0" i="0">
-                <a:solidFill>
-                  <a:srgbClr val="1E293B"/>
-                </a:solidFill>
-                <a:latin typeface="Calibri"/>
-              </a:rPr>
-              <a:t>✗  d</a:t>
-            </a:r>
-          </a:p>
-          <a:p>
-            <a:pPr algn="l">
-              <a:spcAft>
-                <a:spcPts val="300"/>
-              </a:spcAft>
-            </a:pPr>
-            <a:r>
-              <a:rPr sz="850" b="0" i="0">
-                <a:solidFill>
-                  <a:srgbClr val="1E293B"/>
-                </a:solidFill>
-                <a:latin typeface="Calibri"/>
-              </a:rPr>
-              <a:t>✗   </a:t>
-            </a:r>
-          </a:p>
-          <a:p>
-            <a:pPr algn="l">
-              <a:spcAft>
-                <a:spcPts val="300"/>
-              </a:spcAft>
-            </a:pPr>
-            <a:r>
-              <a:rPr sz="850" b="0" i="0">
-                <a:solidFill>
-                  <a:srgbClr val="1E293B"/>
-                </a:solidFill>
-                <a:latin typeface="Calibri"/>
-              </a:rPr>
-              <a:t>✗  p</a:t>
-            </a:r>
-          </a:p>
-          <a:p>
-            <a:pPr algn="l">
-              <a:spcAft>
-                <a:spcPts val="300"/>
-              </a:spcAft>
-            </a:pPr>
-            <a:r>
-              <a:rPr sz="850" b="0" i="0">
-                <a:solidFill>
-                  <a:srgbClr val="1E293B"/>
-                </a:solidFill>
-                <a:latin typeface="Calibri"/>
-              </a:rPr>
-              <a:t>✗  r</a:t>
-            </a:r>
-          </a:p>
-          <a:p>
-            <a:pPr algn="l">
-              <a:spcAft>
-                <a:spcPts val="300"/>
-              </a:spcAft>
-            </a:pPr>
-            <a:r>
-              <a:rPr sz="850" b="0" i="0">
-                <a:solidFill>
-                  <a:srgbClr val="1E293B"/>
-                </a:solidFill>
-                <a:latin typeface="Calibri"/>
-              </a:rPr>
-              <a:t>✗  e</a:t>
-            </a:r>
-          </a:p>
-          <a:p>
-            <a:pPr algn="l">
-              <a:spcAft>
-                <a:spcPts val="300"/>
-              </a:spcAft>
-            </a:pPr>
-            <a:r>
-              <a:rPr sz="850" b="0" i="0">
-                <a:solidFill>
-                  <a:srgbClr val="1E293B"/>
-                </a:solidFill>
-                <a:latin typeface="Calibri"/>
-              </a:rPr>
-              <a:t>✗  d</a:t>
-            </a:r>
-          </a:p>
-          <a:p>
-            <a:pPr algn="l">
-              <a:spcAft>
-                <a:spcPts val="300"/>
-              </a:spcAft>
-            </a:pPr>
-            <a:r>
-              <a:rPr sz="850" b="0" i="0">
-                <a:solidFill>
-                  <a:srgbClr val="1E293B"/>
-                </a:solidFill>
-                <a:latin typeface="Calibri"/>
-              </a:rPr>
-              <a:t>✗  i</a:t>
-            </a:r>
-          </a:p>
-          <a:p>
-            <a:pPr algn="l">
-              <a:spcAft>
-                <a:spcPts val="300"/>
-              </a:spcAft>
-            </a:pPr>
-            <a:r>
-              <a:rPr sz="850" b="0" i="0">
-                <a:solidFill>
-                  <a:srgbClr val="1E293B"/>
-                </a:solidFill>
-                <a:latin typeface="Calibri"/>
-              </a:rPr>
-              <a:t>✗  c</a:t>
-            </a:r>
-          </a:p>
-          <a:p>
-            <a:pPr algn="l">
-              <a:spcAft>
-                <a:spcPts val="300"/>
-              </a:spcAft>
-            </a:pPr>
-            <a:r>
-              <a:rPr sz="850" b="0" i="0">
-                <a:solidFill>
-                  <a:srgbClr val="1E293B"/>
-                </a:solidFill>
-                <a:latin typeface="Calibri"/>
-              </a:rPr>
-              <a:t>✗  t</a:t>
-            </a:r>
-          </a:p>
-          <a:p>
-            <a:pPr algn="l">
-              <a:spcAft>
-                <a:spcPts val="300"/>
-              </a:spcAft>
-            </a:pPr>
-            <a:r>
-              <a:rPr sz="850" b="0" i="0">
-                <a:solidFill>
-                  <a:srgbClr val="1E293B"/>
-                </a:solidFill>
-                <a:latin typeface="Calibri"/>
-              </a:rPr>
-              <a:t>✗  i</a:t>
-            </a:r>
-          </a:p>
-          <a:p>
-            <a:pPr algn="l">
-              <a:spcAft>
-                <a:spcPts val="300"/>
-              </a:spcAft>
-            </a:pPr>
-            <a:r>
-              <a:rPr sz="850" b="0" i="0">
-                <a:solidFill>
-                  <a:srgbClr val="1E293B"/>
-                </a:solidFill>
-                <a:latin typeface="Calibri"/>
-              </a:rPr>
-              <a:t>✗  o</a:t>
-            </a:r>
-          </a:p>
-          <a:p>
-            <a:pPr algn="l">
-              <a:spcAft>
-                <a:spcPts val="300"/>
-              </a:spcAft>
-            </a:pPr>
-            <a:r>
-              <a:rPr sz="850" b="0" i="0">
-                <a:solidFill>
-                  <a:srgbClr val="1E293B"/>
-                </a:solidFill>
-                <a:latin typeface="Calibri"/>
-              </a:rPr>
-              <a:t>✗  n</a:t>
-            </a:r>
-          </a:p>
-          <a:p>
-            <a:pPr algn="l">
-              <a:spcAft>
-                <a:spcPts val="300"/>
-              </a:spcAft>
-            </a:pPr>
-            <a:r>
-              <a:rPr sz="850" b="0" i="0">
-                <a:solidFill>
-                  <a:srgbClr val="1E293B"/>
-                </a:solidFill>
-                <a:latin typeface="Calibri"/>
-              </a:rPr>
-              <a:t>✗   </a:t>
-            </a:r>
-          </a:p>
-          <a:p>
-            <a:pPr algn="l">
-              <a:spcAft>
-                <a:spcPts val="300"/>
-              </a:spcAft>
-            </a:pPr>
-            <a:r>
-              <a:rPr sz="850" b="0" i="0">
-                <a:solidFill>
-                  <a:srgbClr val="1E293B"/>
-                </a:solidFill>
-                <a:latin typeface="Calibri"/>
-              </a:rPr>
-              <a:t>✗  l</a:t>
-            </a:r>
-          </a:p>
-          <a:p>
-            <a:pPr algn="l">
-              <a:spcAft>
-                <a:spcPts val="300"/>
-              </a:spcAft>
-            </a:pPr>
-            <a:r>
-              <a:rPr sz="850" b="0" i="0">
-                <a:solidFill>
-                  <a:srgbClr val="1E293B"/>
-                </a:solidFill>
-                <a:latin typeface="Calibri"/>
-              </a:rPr>
-              <a:t>✗  o</a:t>
-            </a:r>
-          </a:p>
-          <a:p>
-            <a:pPr algn="l">
-              <a:spcAft>
-                <a:spcPts val="300"/>
-              </a:spcAft>
-            </a:pPr>
-            <a:r>
-              <a:rPr sz="850" b="0" i="0">
-                <a:solidFill>
-                  <a:srgbClr val="1E293B"/>
-                </a:solidFill>
-                <a:latin typeface="Calibri"/>
-              </a:rPr>
-              <a:t>✗  g</a:t>
-            </a:r>
-          </a:p>
-          <a:p>
-            <a:pPr algn="l">
-              <a:spcAft>
-                <a:spcPts val="300"/>
-              </a:spcAft>
-            </a:pPr>
-            <a:r>
-              <a:rPr sz="850" b="0" i="0">
-                <a:solidFill>
-                  <a:srgbClr val="1E293B"/>
-                </a:solidFill>
-                <a:latin typeface="Calibri"/>
-              </a:rPr>
-              <a:t>✗  i</a:t>
-            </a:r>
-          </a:p>
-          <a:p>
-            <a:pPr algn="l">
-              <a:spcAft>
-                <a:spcPts val="300"/>
-              </a:spcAft>
-            </a:pPr>
-            <a:r>
-              <a:rPr sz="850" b="0" i="0">
-                <a:solidFill>
-                  <a:srgbClr val="1E293B"/>
-                </a:solidFill>
-                <a:latin typeface="Calibri"/>
-              </a:rPr>
-              <a:t>✗  c</a:t>
+            <a:r>
+              <a:rPr lang="en-US" dirty="0" sz="850">
+                <a:solidFill>
+                  <a:srgbClr val="B91C1C"/>
+                </a:solidFill>
+                <a:latin typeface="Calibri"/>
+              </a:rPr>
+              <a:t>✗  </a:t>
+            </a:r>
+            <a:r>
+              <a:rPr lang="en-US" dirty="0" sz="850">
+                <a:solidFill>
+                  <a:srgbClr val="1A1A1A"/>
+                </a:solidFill>
+                <a:latin typeface="Calibri"/>
+              </a:rPr>
+              <a:t>Custom ML models for problems solvable by OOTB PI classification/similarity</a:t>
+            </a:r>
+          </a:p>
+          <a:p>
+            <a:r>
+              <a:rPr lang="en-US" dirty="0" sz="850">
+                <a:solidFill>
+                  <a:srgbClr val="B91C1C"/>
+                </a:solidFill>
+                <a:latin typeface="Calibri"/>
+              </a:rPr>
+              <a:t>✗  </a:t>
+            </a:r>
+            <a:r>
+              <a:rPr lang="en-US" dirty="0" sz="850">
+                <a:solidFill>
+                  <a:srgbClr val="1A1A1A"/>
+                </a:solidFill>
+                <a:latin typeface="Calibri"/>
+              </a:rPr>
+              <a:t>external ML platforms for data already in ServiceNow</a:t>
+            </a:r>
+          </a:p>
+          <a:p>
+            <a:r>
+              <a:rPr lang="en-US" dirty="0" sz="850">
+                <a:solidFill>
+                  <a:srgbClr val="B91C1C"/>
+                </a:solidFill>
+                <a:latin typeface="Calibri"/>
+              </a:rPr>
+              <a:t>✗  </a:t>
+            </a:r>
+            <a:r>
+              <a:rPr lang="en-US" dirty="0" sz="850">
+                <a:solidFill>
+                  <a:srgbClr val="1A1A1A"/>
+                </a:solidFill>
+                <a:latin typeface="Calibri"/>
+              </a:rPr>
+              <a:t>scripted prediction logic</a:t>
             </a:r>
           </a:p>
         </p:txBody>
